--- a/lecons/F4/51_F4_M2_FS02_Deforestation_in_Cameroon_and_its_Consequences.pptx
+++ b/lecons/F4/51_F4_M2_FS02_Deforestation_in_Cameroon_and_its_Consequences.pptx
@@ -12770,7 +12770,7 @@
         <p:spPr>
           <a:xfrm>
             <a:off x="0" y="658368"/>
-            <a:ext cx="3840480" cy="5833872"/>
+            <a:ext cx="5120640" cy="5833872"/>
           </a:xfrm>
           <a:prstGeom prst="rect">
             <a:avLst/>
@@ -12785,8 +12785,8 @@
         </p:nvSpPr>
         <p:spPr>
           <a:xfrm>
-            <a:off x="4069080" y="1005840"/>
-            <a:ext cx="7802575" cy="731520"/>
+            <a:off x="5349240" y="1005840"/>
+            <a:ext cx="6522415" cy="731520"/>
           </a:xfrm>
           <a:prstGeom prst="rect">
             <a:avLst/>
@@ -12826,8 +12826,8 @@
         </p:nvSpPr>
         <p:spPr>
           <a:xfrm>
-            <a:off x="4069080" y="1783080"/>
-            <a:ext cx="7802575" cy="4663440"/>
+            <a:off x="5349240" y="1783080"/>
+            <a:ext cx="6522415" cy="4663440"/>
           </a:xfrm>
           <a:prstGeom prst="rect">
             <a:avLst/>
@@ -12846,7 +12846,7 @@
               <a:buNone/>
             </a:pPr>
             <a:r>
-              <a:rPr lang="en-US" sz="4000" b="1" dirty="0">
+              <a:rPr lang="en-US" sz="3200" b="1" dirty="0">
                 <a:solidFill>
                   <a:srgbClr val="111111"/>
                 </a:solidFill>
@@ -12856,7 +12856,7 @@
               </a:rPr>
               <a:t>Topic: Management of Primary Resources</a:t>
             </a:r>
-            <a:endParaRPr lang="en-US" sz="4000" dirty="0"/>
+            <a:endParaRPr lang="en-US" sz="3200" dirty="0"/>
           </a:p>
           <a:p>
             <a:pPr algn="l" indent="0" marL="0">
@@ -12866,7 +12866,7 @@
               <a:buNone/>
             </a:pPr>
             <a:r>
-              <a:rPr lang="en-US" sz="4000" b="1" dirty="0">
+              <a:rPr lang="en-US" sz="3200" b="1" dirty="0">
                 <a:solidFill>
                   <a:srgbClr val="111111"/>
                 </a:solidFill>
@@ -12876,7 +12876,7 @@
               </a:rPr>
               <a:t>Sub-topic: The Economic Development Potentials of Cameroon in the Primary Sector: Forestry</a:t>
             </a:r>
-            <a:endParaRPr lang="en-US" sz="4000" dirty="0"/>
+            <a:endParaRPr lang="en-US" sz="3200" dirty="0"/>
           </a:p>
           <a:p>
             <a:pPr algn="l" indent="0" marL="0">
@@ -12886,7 +12886,7 @@
               <a:buNone/>
             </a:pPr>
             <a:r>
-              <a:rPr lang="en-US" sz="4000" b="1" dirty="0">
+              <a:rPr lang="en-US" sz="3200" b="1" dirty="0">
                 <a:solidFill>
                   <a:srgbClr val="990011"/>
                 </a:solidFill>
@@ -12896,7 +12896,7 @@
               </a:rPr>
               <a:t>Further Study 2: Deforestation in Cameroon and its Consequences</a:t>
             </a:r>
-            <a:endParaRPr lang="en-US" sz="4000" dirty="0"/>
+            <a:endParaRPr lang="en-US" sz="3200" dirty="0"/>
           </a:p>
         </p:txBody>
       </p:sp>

--- a/lecons/F4/51_F4_M2_FS02_Deforestation_in_Cameroon_and_its_Consequences.pptx
+++ b/lecons/F4/51_F4_M2_FS02_Deforestation_in_Cameroon_and_its_Consequences.pptx
@@ -54,9 +54,14 @@
     <p:sldId id="302" r:id="rId48"/>
     <p:sldId id="303" r:id="rId49"/>
     <p:sldId id="304" r:id="rId50"/>
+    <p:sldId id="305" r:id="rId51"/>
+    <p:sldId id="306" r:id="rId52"/>
+    <p:sldId id="307" r:id="rId53"/>
+    <p:sldId id="308" r:id="rId54"/>
+    <p:sldId id="309" r:id="rId55"/>
   </p:sldIdLst>
   <p:notesMasterIdLst>
-    <p:notesMasterId r:id="rId51"/>
+    <p:notesMasterId r:id="rId56"/>
   </p:notesMasterIdLst>
   <p:sldSz cx="12192000" cy="6858000"/>
   <p:notesSz cx="6858000" cy="12192000"/>
@@ -2926,7 +2931,7 @@
           <a:p>
             <a:r>
               <a:rPr lang="en-US" dirty="0"/>
-              <a:t>Let us copy Causes and Manifestations. Deforestation in Cameroon has the following causes and signs. On this slide we have Causes and Manifestations. Write each point on a new line, with the key term first, and explain it in your own words when we revise.</a:t>
+              <a:t>Let us copy Causes. Deforestation in Cameroon has the following causes. On this slide we have Farming, Logging and Fuelwood and charcoal. Write each point on a new line, with the key term first, and explain it in your own words when we revise. When you finish, we go to the next slide.</a:t>
             </a:r>
             <a:endParaRPr lang="en-US" dirty="0"/>
           </a:p>
@@ -3014,7 +3019,7 @@
           <a:p>
             <a:r>
               <a:rPr lang="en-US" dirty="0"/>
-              <a:t>Let us copy Consequences and Solutions. Deforestation has consequences and solutions. On this slide we have Consequences. Write each point on a new line, with the key term first, and explain it in your own words when we revise. When you finish, we go to the next slide.</a:t>
+              <a:t>We continue with Causes. On this slide we have Mining and urban growth. Write each point on a new line, with the key term first, and explain it in your own words when we revise.</a:t>
             </a:r>
             <a:endParaRPr lang="en-US" dirty="0"/>
           </a:p>
@@ -3102,7 +3107,7 @@
           <a:p>
             <a:r>
               <a:rPr lang="en-US" dirty="0"/>
-              <a:t>We continue with Consequences and Solutions. On this slide we have Solutions. Write each point on a new line, with the key term first, and explain it in your own words when we revise.</a:t>
+              <a:t>Let us copy Manifestations. Deforestation is seen in the following signs. On this slide we have Bare land and stumps and New roads. Write each point on a new line, with the key term first, and explain it in your own words when we revise. When you finish, we go to the next slide.</a:t>
             </a:r>
             <a:endParaRPr lang="en-US" dirty="0"/>
           </a:p>
@@ -3190,7 +3195,7 @@
           <a:p>
             <a:r>
               <a:rPr lang="en-US" dirty="0"/>
-              <a:t>Now draw this illustration in your notebook: forests and protected areas. Give it a title and label it clearly.</a:t>
+              <a:t>We continue with Manifestations. On this slide we have Shrinking forests. Write each point on a new line, with the key term first, and explain it in your own words when we revise.</a:t>
             </a:r>
             <a:endParaRPr lang="en-US" dirty="0"/>
           </a:p>
@@ -3278,7 +3283,7 @@
           <a:p>
             <a:r>
               <a:rPr lang="en-US" dirty="0"/>
-              <a:t>Now let us check what you have understood. Question 1: Give two causes of deforestation in Cameroon. Answer in your exercise book.</a:t>
+              <a:t>Let us copy Consequences. Deforestation has the following consequences. On this slide we have Soil erosion and Loss of biodiversity. Write each point on a new line, with the key term first, and explain it in your own words when we revise. When you finish, we go to the next slide.</a:t>
             </a:r>
             <a:endParaRPr lang="en-US" dirty="0"/>
           </a:p>
@@ -3366,7 +3371,7 @@
           <a:p>
             <a:r>
               <a:rPr lang="en-US" dirty="0"/>
-              <a:t>The expected answer is: farming and logging. If you got it right, well done.</a:t>
+              <a:t>We continue with Consequences. On this slide we have Drying rivers and Climate change. Write each point on a new line, with the key term first, and explain it in your own words when we revise.</a:t>
             </a:r>
             <a:endParaRPr lang="en-US" dirty="0"/>
           </a:p>
@@ -3542,7 +3547,7 @@
           <a:p>
             <a:r>
               <a:rPr lang="en-US" dirty="0"/>
-              <a:t>Now let us check what you have understood. Question 2: Give two solutions. Answer in your exercise book.</a:t>
+              <a:t>Let us copy Solutions. Deforestation is reduced by the following solutions. On this slide we have Reforestation and Protected areas. Write each point on a new line, with the key term first, and explain it in your own words when we revise. When you finish, we go to the next slide.</a:t>
             </a:r>
             <a:endParaRPr lang="en-US" dirty="0"/>
           </a:p>
@@ -3630,7 +3635,7 @@
           <a:p>
             <a:r>
               <a:rPr lang="en-US" dirty="0"/>
-              <a:t>The expected answer is: reforestation and protected areas. If you got it right, well done.</a:t>
+              <a:t>We continue with Solutions. On this slide we have Enforcement of the Forestry Law and Improved stoves. Write each point on a new line, with the key term first, and explain it in your own words when we revise.</a:t>
             </a:r>
             <a:endParaRPr lang="en-US" dirty="0"/>
           </a:p>
@@ -3718,7 +3723,7 @@
           <a:p>
             <a:r>
               <a:rPr lang="en-US" dirty="0"/>
-              <a:t>For those who need more practice, fill in the blanks in your exercise book. The answers are: number 1, deforestation; number 2, reserve; number 3, improved.</a:t>
+              <a:t>Now draw this illustration in your notebook: forests and protected areas. Give it a title and label it clearly.</a:t>
             </a:r>
             <a:endParaRPr lang="en-US" dirty="0"/>
           </a:p>
@@ -3806,7 +3811,7 @@
           <a:p>
             <a:r>
               <a:rPr lang="en-US" dirty="0"/>
-              <a:t>For your homework: Write three things your school can do against deforestation. We shall correct it at the beginning of our next lesson.</a:t>
+              <a:t>Now let us check what you have understood. Question 1: Give two causes of deforestation in Cameroon. Answer in your exercise book.</a:t>
             </a:r>
             <a:endParaRPr lang="en-US" dirty="0"/>
           </a:p>
@@ -3894,7 +3899,7 @@
           <a:p>
             <a:r>
               <a:rPr lang="en-US" dirty="0"/>
-              <a:t>Our next lesson will be on Practical Work 10: Description of Vegetation on Maps. Thank you for your attention, and see you next time.</a:t>
+              <a:t>The expected answer is: farming and logging. If you got it right, well done.</a:t>
             </a:r>
             <a:endParaRPr lang="en-US" dirty="0"/>
           </a:p>
@@ -3982,7 +3987,7 @@
           <a:p>
             <a:r>
               <a:rPr lang="en-US" dirty="0"/>
-              <a:t>Let us play the bilingual game. I say a word in English, and you give me the French word. Then we do the reverse.</a:t>
+              <a:t>Now let us check what you have understood. Question 2: Give two solutions. Answer in your exercise book.</a:t>
             </a:r>
             <a:endParaRPr lang="en-US" dirty="0"/>
           </a:p>
@@ -4070,7 +4075,7 @@
           <a:p>
             <a:r>
               <a:rPr lang="en-US" dirty="0"/>
-              <a:t>I record this information in the official logbook of the class after the lesson.</a:t>
+              <a:t>The expected answer is: reforestation and protected areas. If you got it right, well done.</a:t>
             </a:r>
             <a:endParaRPr lang="en-US" dirty="0"/>
           </a:p>
@@ -4158,7 +4163,7 @@
           <a:p>
             <a:r>
               <a:rPr lang="en-US" dirty="0"/>
-              <a:t>I complete the second page of the logbook: the matter taught, the evaluation, the homework and the attendance.</a:t>
+              <a:t>For those who need more practice, fill in the blanks in your exercise book. The answers are: number 1, deforestation; number 2, reserve; number 3, improved.</a:t>
             </a:r>
             <a:endParaRPr lang="en-US" dirty="0"/>
           </a:p>
@@ -4246,7 +4251,7 @@
           <a:p>
             <a:r>
               <a:rPr lang="en-US" dirty="0"/>
-              <a:t>This slide is for me, the teacher: it gives the timing of the lesson and what to do if the projector is not available.</a:t>
+              <a:t>For your homework: Write three things your school can do against deforestation. We shall correct it at the beginning of our next lesson.</a:t>
             </a:r>
             <a:endParaRPr lang="en-US" dirty="0"/>
           </a:p>
@@ -4334,7 +4339,7 @@
           <a:p>
             <a:r>
               <a:rPr lang="en-US" dirty="0"/>
-              <a:t>These are the references and picture credits used to prepare this lesson.</a:t>
+              <a:t>Our next lesson will be on Practical Work 10: Description of Vegetation on Maps. Thank you for your attention, and see you next time.</a:t>
             </a:r>
             <a:endParaRPr lang="en-US" dirty="0"/>
           </a:p>
@@ -4446,6 +4451,446 @@
             <a:fld id="{F7021451-1387-4CA6-816F-3879F97B5CBC}" type="slidenum">
               <a:rPr lang="en-US"/>
               <a:t>5</a:t>
+            </a:fld>
+            <a:endParaRPr lang="en-US"/>
+          </a:p>
+        </p:txBody>
+      </p:sp>
+    </p:spTree>
+    <p:extLst>
+      <p:ext uri="{BB962C8B-B14F-4D97-AF65-F5344CB8AC3E}">
+        <p14:creationId xmlns:p14="http://schemas.microsoft.com/office/powerpoint/2010/main" val="1024086991"/>
+      </p:ext>
+    </p:extLst>
+  </p:cSld>
+  <p:clrMapOvr>
+    <a:masterClrMapping/>
+  </p:clrMapOvr>
+</p:notes>
+</file>
+
+<file path=ppt/notesSlides/notesSlide50.xml><?xml version="1.0" encoding="utf-8"?>
+<p:notes xmlns:a="http://schemas.openxmlformats.org/drawingml/2006/main" xmlns:r="http://schemas.openxmlformats.org/officeDocument/2006/relationships" xmlns:p="http://schemas.openxmlformats.org/presentationml/2006/main">
+  <p:cSld>
+    <p:spTree>
+      <p:nvGrpSpPr>
+        <p:cNvPr id="1" name=""/>
+        <p:cNvGrpSpPr/>
+        <p:nvPr/>
+      </p:nvGrpSpPr>
+      <p:grpSpPr>
+        <a:xfrm>
+          <a:off x="0" y="0"/>
+          <a:ext cx="0" cy="0"/>
+          <a:chOff x="0" y="0"/>
+          <a:chExt cx="0" cy="0"/>
+        </a:xfrm>
+      </p:grpSpPr>
+      <p:sp>
+        <p:nvSpPr>
+          <p:cNvPr id="2" name="Slide Image Placeholder 1"/>
+          <p:cNvSpPr>
+            <a:spLocks noGrp="1" noRot="1" noChangeAspect="1"/>
+          </p:cNvSpPr>
+          <p:nvPr>
+            <p:ph type="sldImg"/>
+          </p:nvPr>
+        </p:nvSpPr>
+        <p:spPr/>
+      </p:sp>
+      <p:sp>
+        <p:nvSpPr>
+          <p:cNvPr id="3" name="Notes Placeholder 2"/>
+          <p:cNvSpPr>
+            <a:spLocks noGrp="1"/>
+          </p:cNvSpPr>
+          <p:nvPr>
+            <p:ph type="body" idx="1"/>
+          </p:nvPr>
+        </p:nvSpPr>
+        <p:spPr/>
+        <p:txBody>
+          <a:bodyPr/>
+          <a:lstStyle/>
+          <a:p>
+            <a:r>
+              <a:rPr lang="en-US" dirty="0"/>
+              <a:t>Let us play the bilingual game. I say a word in English, and you give me the French word. Then we do the reverse.</a:t>
+            </a:r>
+            <a:endParaRPr lang="en-US" dirty="0"/>
+          </a:p>
+        </p:txBody>
+      </p:sp>
+      <p:sp>
+        <p:nvSpPr>
+          <p:cNvPr id="4" name="Slide Number Placeholder 3"/>
+          <p:cNvSpPr>
+            <a:spLocks noGrp="1"/>
+          </p:cNvSpPr>
+          <p:nvPr>
+            <p:ph type="sldNum" sz="quarter" idx="10"/>
+          </p:nvPr>
+        </p:nvSpPr>
+        <p:spPr/>
+        <p:txBody>
+          <a:bodyPr/>
+          <a:lstStyle/>
+          <a:p>
+            <a:fld id="{F7021451-1387-4CA6-816F-3879F97B5CBC}" type="slidenum">
+              <a:rPr lang="en-US"/>
+              <a:t>50</a:t>
+            </a:fld>
+            <a:endParaRPr lang="en-US"/>
+          </a:p>
+        </p:txBody>
+      </p:sp>
+    </p:spTree>
+    <p:extLst>
+      <p:ext uri="{BB962C8B-B14F-4D97-AF65-F5344CB8AC3E}">
+        <p14:creationId xmlns:p14="http://schemas.microsoft.com/office/powerpoint/2010/main" val="1024086991"/>
+      </p:ext>
+    </p:extLst>
+  </p:cSld>
+  <p:clrMapOvr>
+    <a:masterClrMapping/>
+  </p:clrMapOvr>
+</p:notes>
+</file>
+
+<file path=ppt/notesSlides/notesSlide51.xml><?xml version="1.0" encoding="utf-8"?>
+<p:notes xmlns:a="http://schemas.openxmlformats.org/drawingml/2006/main" xmlns:r="http://schemas.openxmlformats.org/officeDocument/2006/relationships" xmlns:p="http://schemas.openxmlformats.org/presentationml/2006/main">
+  <p:cSld>
+    <p:spTree>
+      <p:nvGrpSpPr>
+        <p:cNvPr id="1" name=""/>
+        <p:cNvGrpSpPr/>
+        <p:nvPr/>
+      </p:nvGrpSpPr>
+      <p:grpSpPr>
+        <a:xfrm>
+          <a:off x="0" y="0"/>
+          <a:ext cx="0" cy="0"/>
+          <a:chOff x="0" y="0"/>
+          <a:chExt cx="0" cy="0"/>
+        </a:xfrm>
+      </p:grpSpPr>
+      <p:sp>
+        <p:nvSpPr>
+          <p:cNvPr id="2" name="Slide Image Placeholder 1"/>
+          <p:cNvSpPr>
+            <a:spLocks noGrp="1" noRot="1" noChangeAspect="1"/>
+          </p:cNvSpPr>
+          <p:nvPr>
+            <p:ph type="sldImg"/>
+          </p:nvPr>
+        </p:nvSpPr>
+        <p:spPr/>
+      </p:sp>
+      <p:sp>
+        <p:nvSpPr>
+          <p:cNvPr id="3" name="Notes Placeholder 2"/>
+          <p:cNvSpPr>
+            <a:spLocks noGrp="1"/>
+          </p:cNvSpPr>
+          <p:nvPr>
+            <p:ph type="body" idx="1"/>
+          </p:nvPr>
+        </p:nvSpPr>
+        <p:spPr/>
+        <p:txBody>
+          <a:bodyPr/>
+          <a:lstStyle/>
+          <a:p>
+            <a:r>
+              <a:rPr lang="en-US" dirty="0"/>
+              <a:t>I record this information in the official logbook of the class after the lesson.</a:t>
+            </a:r>
+            <a:endParaRPr lang="en-US" dirty="0"/>
+          </a:p>
+        </p:txBody>
+      </p:sp>
+      <p:sp>
+        <p:nvSpPr>
+          <p:cNvPr id="4" name="Slide Number Placeholder 3"/>
+          <p:cNvSpPr>
+            <a:spLocks noGrp="1"/>
+          </p:cNvSpPr>
+          <p:nvPr>
+            <p:ph type="sldNum" sz="quarter" idx="10"/>
+          </p:nvPr>
+        </p:nvSpPr>
+        <p:spPr/>
+        <p:txBody>
+          <a:bodyPr/>
+          <a:lstStyle/>
+          <a:p>
+            <a:fld id="{F7021451-1387-4CA6-816F-3879F97B5CBC}" type="slidenum">
+              <a:rPr lang="en-US"/>
+              <a:t>51</a:t>
+            </a:fld>
+            <a:endParaRPr lang="en-US"/>
+          </a:p>
+        </p:txBody>
+      </p:sp>
+    </p:spTree>
+    <p:extLst>
+      <p:ext uri="{BB962C8B-B14F-4D97-AF65-F5344CB8AC3E}">
+        <p14:creationId xmlns:p14="http://schemas.microsoft.com/office/powerpoint/2010/main" val="1024086991"/>
+      </p:ext>
+    </p:extLst>
+  </p:cSld>
+  <p:clrMapOvr>
+    <a:masterClrMapping/>
+  </p:clrMapOvr>
+</p:notes>
+</file>
+
+<file path=ppt/notesSlides/notesSlide52.xml><?xml version="1.0" encoding="utf-8"?>
+<p:notes xmlns:a="http://schemas.openxmlformats.org/drawingml/2006/main" xmlns:r="http://schemas.openxmlformats.org/officeDocument/2006/relationships" xmlns:p="http://schemas.openxmlformats.org/presentationml/2006/main">
+  <p:cSld>
+    <p:spTree>
+      <p:nvGrpSpPr>
+        <p:cNvPr id="1" name=""/>
+        <p:cNvGrpSpPr/>
+        <p:nvPr/>
+      </p:nvGrpSpPr>
+      <p:grpSpPr>
+        <a:xfrm>
+          <a:off x="0" y="0"/>
+          <a:ext cx="0" cy="0"/>
+          <a:chOff x="0" y="0"/>
+          <a:chExt cx="0" cy="0"/>
+        </a:xfrm>
+      </p:grpSpPr>
+      <p:sp>
+        <p:nvSpPr>
+          <p:cNvPr id="2" name="Slide Image Placeholder 1"/>
+          <p:cNvSpPr>
+            <a:spLocks noGrp="1" noRot="1" noChangeAspect="1"/>
+          </p:cNvSpPr>
+          <p:nvPr>
+            <p:ph type="sldImg"/>
+          </p:nvPr>
+        </p:nvSpPr>
+        <p:spPr/>
+      </p:sp>
+      <p:sp>
+        <p:nvSpPr>
+          <p:cNvPr id="3" name="Notes Placeholder 2"/>
+          <p:cNvSpPr>
+            <a:spLocks noGrp="1"/>
+          </p:cNvSpPr>
+          <p:nvPr>
+            <p:ph type="body" idx="1"/>
+          </p:nvPr>
+        </p:nvSpPr>
+        <p:spPr/>
+        <p:txBody>
+          <a:bodyPr/>
+          <a:lstStyle/>
+          <a:p>
+            <a:r>
+              <a:rPr lang="en-US" dirty="0"/>
+              <a:t>I complete the second page of the logbook: the matter taught, the evaluation, the homework and the attendance.</a:t>
+            </a:r>
+            <a:endParaRPr lang="en-US" dirty="0"/>
+          </a:p>
+        </p:txBody>
+      </p:sp>
+      <p:sp>
+        <p:nvSpPr>
+          <p:cNvPr id="4" name="Slide Number Placeholder 3"/>
+          <p:cNvSpPr>
+            <a:spLocks noGrp="1"/>
+          </p:cNvSpPr>
+          <p:nvPr>
+            <p:ph type="sldNum" sz="quarter" idx="10"/>
+          </p:nvPr>
+        </p:nvSpPr>
+        <p:spPr/>
+        <p:txBody>
+          <a:bodyPr/>
+          <a:lstStyle/>
+          <a:p>
+            <a:fld id="{F7021451-1387-4CA6-816F-3879F97B5CBC}" type="slidenum">
+              <a:rPr lang="en-US"/>
+              <a:t>52</a:t>
+            </a:fld>
+            <a:endParaRPr lang="en-US"/>
+          </a:p>
+        </p:txBody>
+      </p:sp>
+    </p:spTree>
+    <p:extLst>
+      <p:ext uri="{BB962C8B-B14F-4D97-AF65-F5344CB8AC3E}">
+        <p14:creationId xmlns:p14="http://schemas.microsoft.com/office/powerpoint/2010/main" val="1024086991"/>
+      </p:ext>
+    </p:extLst>
+  </p:cSld>
+  <p:clrMapOvr>
+    <a:masterClrMapping/>
+  </p:clrMapOvr>
+</p:notes>
+</file>
+
+<file path=ppt/notesSlides/notesSlide53.xml><?xml version="1.0" encoding="utf-8"?>
+<p:notes xmlns:a="http://schemas.openxmlformats.org/drawingml/2006/main" xmlns:r="http://schemas.openxmlformats.org/officeDocument/2006/relationships" xmlns:p="http://schemas.openxmlformats.org/presentationml/2006/main">
+  <p:cSld>
+    <p:spTree>
+      <p:nvGrpSpPr>
+        <p:cNvPr id="1" name=""/>
+        <p:cNvGrpSpPr/>
+        <p:nvPr/>
+      </p:nvGrpSpPr>
+      <p:grpSpPr>
+        <a:xfrm>
+          <a:off x="0" y="0"/>
+          <a:ext cx="0" cy="0"/>
+          <a:chOff x="0" y="0"/>
+          <a:chExt cx="0" cy="0"/>
+        </a:xfrm>
+      </p:grpSpPr>
+      <p:sp>
+        <p:nvSpPr>
+          <p:cNvPr id="2" name="Slide Image Placeholder 1"/>
+          <p:cNvSpPr>
+            <a:spLocks noGrp="1" noRot="1" noChangeAspect="1"/>
+          </p:cNvSpPr>
+          <p:nvPr>
+            <p:ph type="sldImg"/>
+          </p:nvPr>
+        </p:nvSpPr>
+        <p:spPr/>
+      </p:sp>
+      <p:sp>
+        <p:nvSpPr>
+          <p:cNvPr id="3" name="Notes Placeholder 2"/>
+          <p:cNvSpPr>
+            <a:spLocks noGrp="1"/>
+          </p:cNvSpPr>
+          <p:nvPr>
+            <p:ph type="body" idx="1"/>
+          </p:nvPr>
+        </p:nvSpPr>
+        <p:spPr/>
+        <p:txBody>
+          <a:bodyPr/>
+          <a:lstStyle/>
+          <a:p>
+            <a:r>
+              <a:rPr lang="en-US" dirty="0"/>
+              <a:t>This slide is for me, the teacher: it gives the timing of the lesson and what to do if the projector is not available.</a:t>
+            </a:r>
+            <a:endParaRPr lang="en-US" dirty="0"/>
+          </a:p>
+        </p:txBody>
+      </p:sp>
+      <p:sp>
+        <p:nvSpPr>
+          <p:cNvPr id="4" name="Slide Number Placeholder 3"/>
+          <p:cNvSpPr>
+            <a:spLocks noGrp="1"/>
+          </p:cNvSpPr>
+          <p:nvPr>
+            <p:ph type="sldNum" sz="quarter" idx="10"/>
+          </p:nvPr>
+        </p:nvSpPr>
+        <p:spPr/>
+        <p:txBody>
+          <a:bodyPr/>
+          <a:lstStyle/>
+          <a:p>
+            <a:fld id="{F7021451-1387-4CA6-816F-3879F97B5CBC}" type="slidenum">
+              <a:rPr lang="en-US"/>
+              <a:t>53</a:t>
+            </a:fld>
+            <a:endParaRPr lang="en-US"/>
+          </a:p>
+        </p:txBody>
+      </p:sp>
+    </p:spTree>
+    <p:extLst>
+      <p:ext uri="{BB962C8B-B14F-4D97-AF65-F5344CB8AC3E}">
+        <p14:creationId xmlns:p14="http://schemas.microsoft.com/office/powerpoint/2010/main" val="1024086991"/>
+      </p:ext>
+    </p:extLst>
+  </p:cSld>
+  <p:clrMapOvr>
+    <a:masterClrMapping/>
+  </p:clrMapOvr>
+</p:notes>
+</file>
+
+<file path=ppt/notesSlides/notesSlide54.xml><?xml version="1.0" encoding="utf-8"?>
+<p:notes xmlns:a="http://schemas.openxmlformats.org/drawingml/2006/main" xmlns:r="http://schemas.openxmlformats.org/officeDocument/2006/relationships" xmlns:p="http://schemas.openxmlformats.org/presentationml/2006/main">
+  <p:cSld>
+    <p:spTree>
+      <p:nvGrpSpPr>
+        <p:cNvPr id="1" name=""/>
+        <p:cNvGrpSpPr/>
+        <p:nvPr/>
+      </p:nvGrpSpPr>
+      <p:grpSpPr>
+        <a:xfrm>
+          <a:off x="0" y="0"/>
+          <a:ext cx="0" cy="0"/>
+          <a:chOff x="0" y="0"/>
+          <a:chExt cx="0" cy="0"/>
+        </a:xfrm>
+      </p:grpSpPr>
+      <p:sp>
+        <p:nvSpPr>
+          <p:cNvPr id="2" name="Slide Image Placeholder 1"/>
+          <p:cNvSpPr>
+            <a:spLocks noGrp="1" noRot="1" noChangeAspect="1"/>
+          </p:cNvSpPr>
+          <p:nvPr>
+            <p:ph type="sldImg"/>
+          </p:nvPr>
+        </p:nvSpPr>
+        <p:spPr/>
+      </p:sp>
+      <p:sp>
+        <p:nvSpPr>
+          <p:cNvPr id="3" name="Notes Placeholder 2"/>
+          <p:cNvSpPr>
+            <a:spLocks noGrp="1"/>
+          </p:cNvSpPr>
+          <p:nvPr>
+            <p:ph type="body" idx="1"/>
+          </p:nvPr>
+        </p:nvSpPr>
+        <p:spPr/>
+        <p:txBody>
+          <a:bodyPr/>
+          <a:lstStyle/>
+          <a:p>
+            <a:r>
+              <a:rPr lang="en-US" dirty="0"/>
+              <a:t>These are the references and picture credits used to prepare this lesson.</a:t>
+            </a:r>
+            <a:endParaRPr lang="en-US" dirty="0"/>
+          </a:p>
+        </p:txBody>
+      </p:sp>
+      <p:sp>
+        <p:nvSpPr>
+          <p:cNvPr id="4" name="Slide Number Placeholder 3"/>
+          <p:cNvSpPr>
+            <a:spLocks noGrp="1"/>
+          </p:cNvSpPr>
+          <p:nvPr>
+            <p:ph type="sldNum" sz="quarter" idx="10"/>
+          </p:nvPr>
+        </p:nvSpPr>
+        <p:spPr/>
+        <p:txBody>
+          <a:bodyPr/>
+          <a:lstStyle/>
+          <a:p>
+            <a:fld id="{F7021451-1387-4CA6-816F-3879F97B5CBC}" type="slidenum">
+              <a:rPr lang="en-US"/>
+              <a:t>54</a:t>
             </a:fld>
             <a:endParaRPr lang="en-US"/>
           </a:p>
@@ -13029,7 +13474,7 @@
         <p:spPr>
           <a:xfrm>
             <a:off x="0" y="658368"/>
-            <a:ext cx="2468880" cy="5833872"/>
+            <a:ext cx="1463040" cy="5833872"/>
           </a:xfrm>
           <a:prstGeom prst="rect">
             <a:avLst/>
@@ -13044,8 +13489,8 @@
         </p:nvSpPr>
         <p:spPr>
           <a:xfrm>
-            <a:off x="2697480" y="1005840"/>
-            <a:ext cx="9174175" cy="731520"/>
+            <a:off x="1691640" y="1005840"/>
+            <a:ext cx="10180015" cy="731520"/>
           </a:xfrm>
           <a:prstGeom prst="rect">
             <a:avLst/>
@@ -13085,8 +13530,47 @@
         </p:nvSpPr>
         <p:spPr>
           <a:xfrm>
-            <a:off x="2697480" y="1783080"/>
-            <a:ext cx="9174175" cy="4663440"/>
+            <a:off x="1691640" y="1737360"/>
+            <a:ext cx="10180015" cy="457200"/>
+          </a:xfrm>
+          <a:prstGeom prst="rect">
+            <a:avLst/>
+          </a:prstGeom>
+          <a:noFill/>
+          <a:ln/>
+        </p:spPr>
+        <p:txBody>
+          <a:bodyPr wrap="square" lIns="0" tIns="0" rIns="0" bIns="0" rtlCol="0" anchor="ctr"/>
+          <a:lstStyle/>
+          <a:p>
+            <a:pPr algn="l" indent="0" marL="0">
+              <a:buNone/>
+            </a:pPr>
+            <a:r>
+              <a:rPr lang="en-US" sz="3200" b="1" dirty="0">
+                <a:solidFill>
+                  <a:srgbClr val="990011"/>
+                </a:solidFill>
+                <a:latin typeface="Times New Roman" pitchFamily="34" charset="0"/>
+                <a:ea typeface="Times New Roman" pitchFamily="34" charset="-122"/>
+                <a:cs typeface="Times New Roman" pitchFamily="34" charset="-120"/>
+              </a:rPr>
+              <a:t>A) Causes</a:t>
+            </a:r>
+            <a:endParaRPr lang="en-US" sz="3200" dirty="0"/>
+          </a:p>
+        </p:txBody>
+      </p:sp>
+      <p:sp>
+        <p:nvSpPr>
+          <p:cNvPr id="6" name="Text 3"/>
+          <p:cNvSpPr/>
+          <p:nvPr/>
+        </p:nvSpPr>
+        <p:spPr>
+          <a:xfrm>
+            <a:off x="1691640" y="2240280"/>
+            <a:ext cx="10180015" cy="4206240"/>
           </a:xfrm>
           <a:prstGeom prst="rect">
             <a:avLst/>
@@ -13113,7 +13597,7 @@
                 <a:ea typeface="Times New Roman" pitchFamily="34" charset="-122"/>
                 <a:cs typeface="Times New Roman" pitchFamily="34" charset="-120"/>
               </a:rPr>
-              <a:t>Deforestation in Cameroon has the following causes and signs:</a:t>
+              <a:t>Deforestation in Cameroon has the following causes:</a:t>
             </a:r>
             <a:endParaRPr lang="en-US" sz="4000" dirty="0"/>
           </a:p>
@@ -13133,7 +13617,7 @@
                 <a:ea typeface="Times New Roman" pitchFamily="34" charset="-122"/>
                 <a:cs typeface="Times New Roman" pitchFamily="34" charset="-120"/>
               </a:rPr>
-              <a:t>Causes: </a:t>
+              <a:t>Farming: </a:t>
             </a:r>
             <a:pPr algn="l" indent="0" marL="0">
               <a:spcAft>
@@ -13150,7 +13634,7 @@
                 <a:ea typeface="Times New Roman" pitchFamily="34" charset="-122"/>
                 <a:cs typeface="Times New Roman" pitchFamily="34" charset="-120"/>
               </a:rPr>
-              <a:t>Farming, logging, fuelwood and charcoal, mining and urban growth destroy forests.</a:t>
+              <a:t>Farmers clear forest for new farms.</a:t>
             </a:r>
             <a:endParaRPr lang="en-US" sz="4000" dirty="0"/>
           </a:p>
@@ -13170,7 +13654,7 @@
                 <a:ea typeface="Times New Roman" pitchFamily="34" charset="-122"/>
                 <a:cs typeface="Times New Roman" pitchFamily="34" charset="-120"/>
               </a:rPr>
-              <a:t>Manifestations: </a:t>
+              <a:t>Logging: </a:t>
             </a:r>
             <a:pPr algn="l" indent="0" marL="0">
               <a:spcAft>
@@ -13187,7 +13671,44 @@
                 <a:ea typeface="Times New Roman" pitchFamily="34" charset="-122"/>
                 <a:cs typeface="Times New Roman" pitchFamily="34" charset="-120"/>
               </a:rPr>
-              <a:t>Bare land, stumps, new roads and shrinking forest areas appear.</a:t>
+              <a:t>Companies cut valuable trees.</a:t>
+            </a:r>
+            <a:endParaRPr lang="en-US" sz="4000" dirty="0"/>
+          </a:p>
+          <a:p>
+            <a:pPr algn="l" indent="0" marL="0">
+              <a:spcAft>
+                <a:spcPts val="800"/>
+              </a:spcAft>
+              <a:buNone/>
+            </a:pPr>
+            <a:r>
+              <a:rPr lang="en-US" sz="4000" b="1" dirty="0">
+                <a:solidFill>
+                  <a:srgbClr val="111111"/>
+                </a:solidFill>
+                <a:latin typeface="Times New Roman" pitchFamily="34" charset="0"/>
+                <a:ea typeface="Times New Roman" pitchFamily="34" charset="-122"/>
+                <a:cs typeface="Times New Roman" pitchFamily="34" charset="-120"/>
+              </a:rPr>
+              <a:t>Fuelwood and charcoal: </a:t>
+            </a:r>
+            <a:pPr algn="l" indent="0" marL="0">
+              <a:spcAft>
+                <a:spcPts val="800"/>
+              </a:spcAft>
+              <a:buNone/>
+            </a:pPr>
+            <a:r>
+              <a:rPr lang="en-US" sz="4000" dirty="0">
+                <a:solidFill>
+                  <a:srgbClr val="111111"/>
+                </a:solidFill>
+                <a:latin typeface="Times New Roman" pitchFamily="34" charset="0"/>
+                <a:ea typeface="Times New Roman" pitchFamily="34" charset="-122"/>
+                <a:cs typeface="Times New Roman" pitchFamily="34" charset="-120"/>
+              </a:rPr>
+              <a:t>Trees are cut for cooking.</a:t>
             </a:r>
             <a:endParaRPr lang="en-US" sz="4000" dirty="0"/>
           </a:p>
@@ -13364,7 +13885,7 @@
                 <a:ea typeface="Times New Roman" pitchFamily="34" charset="-122"/>
                 <a:cs typeface="Times New Roman" pitchFamily="34" charset="-120"/>
               </a:rPr>
-              <a:t>2. Consequences and Solutions</a:t>
+              <a:t>1. Causes and Manifestations</a:t>
             </a:r>
             <a:endParaRPr lang="en-US" sz="3600" dirty="0"/>
           </a:p>
@@ -13378,8 +13899,47 @@
         </p:nvSpPr>
         <p:spPr>
           <a:xfrm>
-            <a:off x="5349240" y="1783080"/>
-            <a:ext cx="6522415" cy="4663440"/>
+            <a:off x="5349240" y="1737360"/>
+            <a:ext cx="6522415" cy="457200"/>
+          </a:xfrm>
+          <a:prstGeom prst="rect">
+            <a:avLst/>
+          </a:prstGeom>
+          <a:noFill/>
+          <a:ln/>
+        </p:spPr>
+        <p:txBody>
+          <a:bodyPr wrap="square" lIns="0" tIns="0" rIns="0" bIns="0" rtlCol="0" anchor="ctr"/>
+          <a:lstStyle/>
+          <a:p>
+            <a:pPr algn="l" indent="0" marL="0">
+              <a:buNone/>
+            </a:pPr>
+            <a:r>
+              <a:rPr lang="en-US" sz="3200" b="1" dirty="0">
+                <a:solidFill>
+                  <a:srgbClr val="990011"/>
+                </a:solidFill>
+                <a:latin typeface="Times New Roman" pitchFamily="34" charset="0"/>
+                <a:ea typeface="Times New Roman" pitchFamily="34" charset="-122"/>
+                <a:cs typeface="Times New Roman" pitchFamily="34" charset="-120"/>
+              </a:rPr>
+              <a:t>A) Causes (continued)</a:t>
+            </a:r>
+            <a:endParaRPr lang="en-US" sz="3200" dirty="0"/>
+          </a:p>
+        </p:txBody>
+      </p:sp>
+      <p:sp>
+        <p:nvSpPr>
+          <p:cNvPr id="6" name="Text 3"/>
+          <p:cNvSpPr/>
+          <p:nvPr/>
+        </p:nvSpPr>
+        <p:spPr>
+          <a:xfrm>
+            <a:off x="5349240" y="2240280"/>
+            <a:ext cx="6522415" cy="4206240"/>
           </a:xfrm>
           <a:prstGeom prst="rect">
             <a:avLst/>
@@ -13398,7 +13958,7 @@
               <a:buNone/>
             </a:pPr>
             <a:r>
-              <a:rPr lang="en-US" sz="4000" i="1" dirty="0">
+              <a:rPr lang="en-US" sz="4000" b="1" dirty="0">
                 <a:solidFill>
                   <a:srgbClr val="111111"/>
                 </a:solidFill>
@@ -13406,11 +13966,8 @@
                 <a:ea typeface="Times New Roman" pitchFamily="34" charset="-122"/>
                 <a:cs typeface="Times New Roman" pitchFamily="34" charset="-120"/>
               </a:rPr>
-              <a:t>Deforestation has consequences and solutions:</a:t>
-            </a:r>
-            <a:endParaRPr lang="en-US" sz="4000" dirty="0"/>
-          </a:p>
-          <a:p>
+              <a:t>Mining and urban growth: </a:t>
+            </a:r>
             <a:pPr algn="l" indent="0" marL="0">
               <a:spcAft>
                 <a:spcPts val="800"/>
@@ -13418,7 +13975,7 @@
               <a:buNone/>
             </a:pPr>
             <a:r>
-              <a:rPr lang="en-US" sz="4000" b="1" dirty="0">
+              <a:rPr lang="en-US" sz="4000" dirty="0">
                 <a:solidFill>
                   <a:srgbClr val="111111"/>
                 </a:solidFill>
@@ -13426,24 +13983,7 @@
                 <a:ea typeface="Times New Roman" pitchFamily="34" charset="-122"/>
                 <a:cs typeface="Times New Roman" pitchFamily="34" charset="-120"/>
               </a:rPr>
-              <a:t>Consequences: </a:t>
-            </a:r>
-            <a:pPr algn="l" indent="0" marL="0">
-              <a:spcAft>
-                <a:spcPts val="800"/>
-              </a:spcAft>
-              <a:buNone/>
-            </a:pPr>
-            <a:r>
-              <a:rPr lang="en-US" sz="4000" dirty="0">
-                <a:solidFill>
-                  <a:srgbClr val="111111"/>
-                </a:solidFill>
-                <a:latin typeface="Times New Roman" pitchFamily="34" charset="0"/>
-                <a:ea typeface="Times New Roman" pitchFamily="34" charset="-122"/>
-                <a:cs typeface="Times New Roman" pitchFamily="34" charset="-120"/>
-              </a:rPr>
-              <a:t>Soil erosion, loss of biodiversity, drying rivers and climate change occur.</a:t>
+              <a:t>Mines and towns replace forests.</a:t>
             </a:r>
             <a:endParaRPr lang="en-US" sz="4000" dirty="0"/>
           </a:p>
@@ -13578,7 +14118,7 @@
         <p:spPr>
           <a:xfrm>
             <a:off x="0" y="658368"/>
-            <a:ext cx="5120640" cy="5833872"/>
+            <a:ext cx="3840480" cy="5833872"/>
           </a:xfrm>
           <a:prstGeom prst="rect">
             <a:avLst/>
@@ -13593,8 +14133,8 @@
         </p:nvSpPr>
         <p:spPr>
           <a:xfrm>
-            <a:off x="5349240" y="1005840"/>
-            <a:ext cx="6522415" cy="731520"/>
+            <a:off x="4069080" y="1005840"/>
+            <a:ext cx="7802575" cy="731520"/>
           </a:xfrm>
           <a:prstGeom prst="rect">
             <a:avLst/>
@@ -13620,7 +14160,7 @@
                 <a:ea typeface="Times New Roman" pitchFamily="34" charset="-122"/>
                 <a:cs typeface="Times New Roman" pitchFamily="34" charset="-120"/>
               </a:rPr>
-              <a:t>2. Consequences and Solutions (continued)</a:t>
+              <a:t>1. Causes and Manifestations</a:t>
             </a:r>
             <a:endParaRPr lang="en-US" sz="3600" dirty="0"/>
           </a:p>
@@ -13634,8 +14174,47 @@
         </p:nvSpPr>
         <p:spPr>
           <a:xfrm>
-            <a:off x="5349240" y="1783080"/>
-            <a:ext cx="6522415" cy="4663440"/>
+            <a:off x="4069080" y="1737360"/>
+            <a:ext cx="7802575" cy="457200"/>
+          </a:xfrm>
+          <a:prstGeom prst="rect">
+            <a:avLst/>
+          </a:prstGeom>
+          <a:noFill/>
+          <a:ln/>
+        </p:spPr>
+        <p:txBody>
+          <a:bodyPr wrap="square" lIns="0" tIns="0" rIns="0" bIns="0" rtlCol="0" anchor="ctr"/>
+          <a:lstStyle/>
+          <a:p>
+            <a:pPr algn="l" indent="0" marL="0">
+              <a:buNone/>
+            </a:pPr>
+            <a:r>
+              <a:rPr lang="en-US" sz="3200" b="1" dirty="0">
+                <a:solidFill>
+                  <a:srgbClr val="990011"/>
+                </a:solidFill>
+                <a:latin typeface="Times New Roman" pitchFamily="34" charset="0"/>
+                <a:ea typeface="Times New Roman" pitchFamily="34" charset="-122"/>
+                <a:cs typeface="Times New Roman" pitchFamily="34" charset="-120"/>
+              </a:rPr>
+              <a:t>B) Manifestations</a:t>
+            </a:r>
+            <a:endParaRPr lang="en-US" sz="3200" dirty="0"/>
+          </a:p>
+        </p:txBody>
+      </p:sp>
+      <p:sp>
+        <p:nvSpPr>
+          <p:cNvPr id="6" name="Text 3"/>
+          <p:cNvSpPr/>
+          <p:nvPr/>
+        </p:nvSpPr>
+        <p:spPr>
+          <a:xfrm>
+            <a:off x="4069080" y="2240280"/>
+            <a:ext cx="7802575" cy="4206240"/>
           </a:xfrm>
           <a:prstGeom prst="rect">
             <a:avLst/>
@@ -13654,7 +14233,7 @@
               <a:buNone/>
             </a:pPr>
             <a:r>
-              <a:rPr lang="en-US" sz="4000" b="1" dirty="0">
+              <a:rPr lang="en-US" sz="4000" i="1" dirty="0">
                 <a:solidFill>
                   <a:srgbClr val="111111"/>
                 </a:solidFill>
@@ -13662,8 +14241,11 @@
                 <a:ea typeface="Times New Roman" pitchFamily="34" charset="-122"/>
                 <a:cs typeface="Times New Roman" pitchFamily="34" charset="-120"/>
               </a:rPr>
-              <a:t>Solutions: </a:t>
-            </a:r>
+              <a:t>Deforestation is seen in the following signs:</a:t>
+            </a:r>
+            <a:endParaRPr lang="en-US" sz="4000" dirty="0"/>
+          </a:p>
+          <a:p>
             <a:pPr algn="l" indent="0" marL="0">
               <a:spcAft>
                 <a:spcPts val="800"/>
@@ -13671,7 +14253,7 @@
               <a:buNone/>
             </a:pPr>
             <a:r>
-              <a:rPr lang="en-US" sz="4000" dirty="0">
+              <a:rPr lang="en-US" sz="4000" b="1" dirty="0">
                 <a:solidFill>
                   <a:srgbClr val="111111"/>
                 </a:solidFill>
@@ -13679,7 +14261,61 @@
                 <a:ea typeface="Times New Roman" pitchFamily="34" charset="-122"/>
                 <a:cs typeface="Times New Roman" pitchFamily="34" charset="-120"/>
               </a:rPr>
-              <a:t>Reforestation, protected areas, enforcement of the Forestry Law and improved stoves reduce deforestation.</a:t>
+              <a:t>Bare land and stumps: </a:t>
+            </a:r>
+            <a:pPr algn="l" indent="0" marL="0">
+              <a:spcAft>
+                <a:spcPts val="800"/>
+              </a:spcAft>
+              <a:buNone/>
+            </a:pPr>
+            <a:r>
+              <a:rPr lang="en-US" sz="4000" dirty="0">
+                <a:solidFill>
+                  <a:srgbClr val="111111"/>
+                </a:solidFill>
+                <a:latin typeface="Times New Roman" pitchFamily="34" charset="0"/>
+                <a:ea typeface="Times New Roman" pitchFamily="34" charset="-122"/>
+                <a:cs typeface="Times New Roman" pitchFamily="34" charset="-120"/>
+              </a:rPr>
+              <a:t>Cleared areas show tree stumps.</a:t>
+            </a:r>
+            <a:endParaRPr lang="en-US" sz="4000" dirty="0"/>
+          </a:p>
+          <a:p>
+            <a:pPr algn="l" indent="0" marL="0">
+              <a:spcAft>
+                <a:spcPts val="800"/>
+              </a:spcAft>
+              <a:buNone/>
+            </a:pPr>
+            <a:r>
+              <a:rPr lang="en-US" sz="4000" b="1" dirty="0">
+                <a:solidFill>
+                  <a:srgbClr val="111111"/>
+                </a:solidFill>
+                <a:latin typeface="Times New Roman" pitchFamily="34" charset="0"/>
+                <a:ea typeface="Times New Roman" pitchFamily="34" charset="-122"/>
+                <a:cs typeface="Times New Roman" pitchFamily="34" charset="-120"/>
+              </a:rPr>
+              <a:t>New roads: </a:t>
+            </a:r>
+            <a:pPr algn="l" indent="0" marL="0">
+              <a:spcAft>
+                <a:spcPts val="800"/>
+              </a:spcAft>
+              <a:buNone/>
+            </a:pPr>
+            <a:r>
+              <a:rPr lang="en-US" sz="4000" dirty="0">
+                <a:solidFill>
+                  <a:srgbClr val="111111"/>
+                </a:solidFill>
+                <a:latin typeface="Times New Roman" pitchFamily="34" charset="0"/>
+                <a:ea typeface="Times New Roman" pitchFamily="34" charset="-122"/>
+                <a:cs typeface="Times New Roman" pitchFamily="34" charset="-120"/>
+              </a:rPr>
+              <a:t>Logging roads cut through the forest.</a:t>
             </a:r>
             <a:endParaRPr lang="en-US" sz="4000" dirty="0"/>
           </a:p>
@@ -13797,48 +14433,9 @@
           </a:p>
         </p:txBody>
       </p:sp>
-      <p:sp>
-        <p:nvSpPr>
-          <p:cNvPr id="3" name="Text 1"/>
-          <p:cNvSpPr/>
-          <p:nvPr/>
-        </p:nvSpPr>
-        <p:spPr>
-          <a:xfrm>
-            <a:off x="457200" y="1005840"/>
-            <a:ext cx="11277295" cy="731520"/>
-          </a:xfrm>
-          <a:prstGeom prst="rect">
-            <a:avLst/>
-          </a:prstGeom>
-          <a:noFill/>
-          <a:ln/>
-        </p:spPr>
-        <p:txBody>
-          <a:bodyPr wrap="square" lIns="0" tIns="0" rIns="0" bIns="0" rtlCol="0" anchor="ctr"/>
-          <a:lstStyle/>
-          <a:p>
-            <a:pPr algn="ctr" indent="0" marL="0">
-              <a:buNone/>
-            </a:pPr>
-            <a:r>
-              <a:rPr lang="en-US" sz="3600" b="1" dirty="0">
-                <a:solidFill>
-                  <a:srgbClr val="990011"/>
-                </a:solidFill>
-                <a:latin typeface="Times New Roman" pitchFamily="34" charset="0"/>
-                <a:ea typeface="Times New Roman" pitchFamily="34" charset="-122"/>
-                <a:cs typeface="Times New Roman" pitchFamily="34" charset="-120"/>
-              </a:rPr>
-              <a:t>2. Consequences and Solutions</a:t>
-            </a:r>
-            <a:endParaRPr lang="en-US" sz="3600" dirty="0"/>
-          </a:p>
-        </p:txBody>
-      </p:sp>
       <p:pic>
         <p:nvPicPr>
-          <p:cNvPr id="4" name="Image 0" descr="/home/claude/f4/img/v2/cmr_forest_big.png">    </p:cNvPr>
+          <p:cNvPr id="3" name="Image 0" descr="/home/claude/f4/img/minesec_sheet.png">    </p:cNvPr>
           <p:cNvPicPr>
             <a:picLocks noChangeAspect="1"/>
           </p:cNvPicPr>
@@ -13852,8 +14449,8 @@
         </p:blipFill>
         <p:spPr>
           <a:xfrm>
-            <a:off x="1825600" y="1783080"/>
-            <a:ext cx="8540496" cy="4270248"/>
+            <a:off x="0" y="658368"/>
+            <a:ext cx="5120640" cy="5833872"/>
           </a:xfrm>
           <a:prstGeom prst="rect">
             <a:avLst/>
@@ -13862,14 +14459,14 @@
       </p:pic>
       <p:sp>
         <p:nvSpPr>
-          <p:cNvPr id="5" name="Text 2"/>
+          <p:cNvPr id="4" name="Text 1"/>
           <p:cNvSpPr/>
           <p:nvPr/>
         </p:nvSpPr>
         <p:spPr>
           <a:xfrm>
-            <a:off x="457200" y="6089904"/>
-            <a:ext cx="11277295" cy="347472"/>
+            <a:off x="5349240" y="1005840"/>
+            <a:ext cx="6522415" cy="731520"/>
           </a:xfrm>
           <a:prstGeom prst="rect">
             <a:avLst/>
@@ -13878,24 +14475,124 @@
           <a:ln/>
         </p:spPr>
         <p:txBody>
-          <a:bodyPr wrap="square" lIns="0" tIns="0" rIns="0" bIns="0" rtlCol="0" anchor="ctr"/>
+          <a:bodyPr wrap="square" lIns="0" tIns="0" rIns="0" bIns="0" rtlCol="0" anchor="ctr">
+            <a:normAutofit/>
+          </a:bodyPr>
           <a:lstStyle/>
           <a:p>
             <a:pPr algn="ctr" indent="0" marL="0">
               <a:buNone/>
             </a:pPr>
             <a:r>
-              <a:rPr lang="en-US" sz="1800" i="1" dirty="0">
-                <a:solidFill>
-                  <a:srgbClr val="555555"/>
+              <a:rPr lang="en-US" sz="3600" b="1" dirty="0">
+                <a:solidFill>
+                  <a:srgbClr val="990011"/>
                 </a:solidFill>
                 <a:latin typeface="Times New Roman" pitchFamily="34" charset="0"/>
                 <a:ea typeface="Times New Roman" pitchFamily="34" charset="-122"/>
                 <a:cs typeface="Times New Roman" pitchFamily="34" charset="-120"/>
               </a:rPr>
-              <a:t>Illustration: forests and protected areas</a:t>
-            </a:r>
-            <a:endParaRPr lang="en-US" sz="1800" dirty="0"/>
+              <a:t>1. Causes and Manifestations</a:t>
+            </a:r>
+            <a:endParaRPr lang="en-US" sz="3600" dirty="0"/>
+          </a:p>
+        </p:txBody>
+      </p:sp>
+      <p:sp>
+        <p:nvSpPr>
+          <p:cNvPr id="5" name="Text 2"/>
+          <p:cNvSpPr/>
+          <p:nvPr/>
+        </p:nvSpPr>
+        <p:spPr>
+          <a:xfrm>
+            <a:off x="5349240" y="1737360"/>
+            <a:ext cx="6522415" cy="457200"/>
+          </a:xfrm>
+          <a:prstGeom prst="rect">
+            <a:avLst/>
+          </a:prstGeom>
+          <a:noFill/>
+          <a:ln/>
+        </p:spPr>
+        <p:txBody>
+          <a:bodyPr wrap="square" lIns="0" tIns="0" rIns="0" bIns="0" rtlCol="0" anchor="ctr"/>
+          <a:lstStyle/>
+          <a:p>
+            <a:pPr algn="l" indent="0" marL="0">
+              <a:buNone/>
+            </a:pPr>
+            <a:r>
+              <a:rPr lang="en-US" sz="3200" b="1" dirty="0">
+                <a:solidFill>
+                  <a:srgbClr val="990011"/>
+                </a:solidFill>
+                <a:latin typeface="Times New Roman" pitchFamily="34" charset="0"/>
+                <a:ea typeface="Times New Roman" pitchFamily="34" charset="-122"/>
+                <a:cs typeface="Times New Roman" pitchFamily="34" charset="-120"/>
+              </a:rPr>
+              <a:t>B) Manifestations (continued)</a:t>
+            </a:r>
+            <a:endParaRPr lang="en-US" sz="3200" dirty="0"/>
+          </a:p>
+        </p:txBody>
+      </p:sp>
+      <p:sp>
+        <p:nvSpPr>
+          <p:cNvPr id="6" name="Text 3"/>
+          <p:cNvSpPr/>
+          <p:nvPr/>
+        </p:nvSpPr>
+        <p:spPr>
+          <a:xfrm>
+            <a:off x="5349240" y="2240280"/>
+            <a:ext cx="6522415" cy="4206240"/>
+          </a:xfrm>
+          <a:prstGeom prst="rect">
+            <a:avLst/>
+          </a:prstGeom>
+          <a:noFill/>
+          <a:ln/>
+        </p:spPr>
+        <p:txBody>
+          <a:bodyPr wrap="square" lIns="0" tIns="0" rIns="0" bIns="0" rtlCol="0" anchor="t"/>
+          <a:lstStyle/>
+          <a:p>
+            <a:pPr algn="l" indent="0" marL="0">
+              <a:spcAft>
+                <a:spcPts val="800"/>
+              </a:spcAft>
+              <a:buNone/>
+            </a:pPr>
+            <a:r>
+              <a:rPr lang="en-US" sz="4000" b="1" dirty="0">
+                <a:solidFill>
+                  <a:srgbClr val="111111"/>
+                </a:solidFill>
+                <a:latin typeface="Times New Roman" pitchFamily="34" charset="0"/>
+                <a:ea typeface="Times New Roman" pitchFamily="34" charset="-122"/>
+                <a:cs typeface="Times New Roman" pitchFamily="34" charset="-120"/>
+              </a:rPr>
+              <a:t>Shrinking forests: </a:t>
+            </a:r>
+            <a:pPr algn="l" indent="0" marL="0">
+              <a:spcAft>
+                <a:spcPts val="800"/>
+              </a:spcAft>
+              <a:buNone/>
+            </a:pPr>
+            <a:r>
+              <a:rPr lang="en-US" sz="4000" dirty="0">
+                <a:solidFill>
+                  <a:srgbClr val="111111"/>
+                </a:solidFill>
+                <a:latin typeface="Times New Roman" pitchFamily="34" charset="0"/>
+                <a:ea typeface="Times New Roman" pitchFamily="34" charset="-122"/>
+                <a:cs typeface="Times New Roman" pitchFamily="34" charset="-120"/>
+              </a:rPr>
+              <a:t>Satellite images show smaller forest areas.</a:t>
+            </a:r>
+            <a:endParaRPr lang="en-US" sz="4000" dirty="0"/>
           </a:p>
         </p:txBody>
       </p:sp>
@@ -14005,7 +14702,7 @@
                 <a:ea typeface="Calibri" pitchFamily="34" charset="-122"/>
                 <a:cs typeface="Calibri" pitchFamily="34" charset="-120"/>
               </a:rPr>
-              <a:t>FORMATIVE EVALUATION</a:t>
+              <a:t>BOARD SUMMARY</a:t>
             </a:r>
             <a:endParaRPr lang="en-US" sz="1400" dirty="0"/>
           </a:p>
@@ -14070,7 +14767,7 @@
                 <a:ea typeface="Times New Roman" pitchFamily="34" charset="-122"/>
                 <a:cs typeface="Times New Roman" pitchFamily="34" charset="-120"/>
               </a:rPr>
-              <a:t>Evaluation 1</a:t>
+              <a:t>2. Consequences and Solutions</a:t>
             </a:r>
             <a:endParaRPr lang="en-US" sz="3600" dirty="0"/>
           </a:p>
@@ -14084,8 +14781,47 @@
         </p:nvSpPr>
         <p:spPr>
           <a:xfrm>
-            <a:off x="5349240" y="1783080"/>
-            <a:ext cx="6522415" cy="4663440"/>
+            <a:off x="5349240" y="1737360"/>
+            <a:ext cx="6522415" cy="457200"/>
+          </a:xfrm>
+          <a:prstGeom prst="rect">
+            <a:avLst/>
+          </a:prstGeom>
+          <a:noFill/>
+          <a:ln/>
+        </p:spPr>
+        <p:txBody>
+          <a:bodyPr wrap="square" lIns="0" tIns="0" rIns="0" bIns="0" rtlCol="0" anchor="ctr"/>
+          <a:lstStyle/>
+          <a:p>
+            <a:pPr algn="l" indent="0" marL="0">
+              <a:buNone/>
+            </a:pPr>
+            <a:r>
+              <a:rPr lang="en-US" sz="3200" b="1" dirty="0">
+                <a:solidFill>
+                  <a:srgbClr val="990011"/>
+                </a:solidFill>
+                <a:latin typeface="Times New Roman" pitchFamily="34" charset="0"/>
+                <a:ea typeface="Times New Roman" pitchFamily="34" charset="-122"/>
+                <a:cs typeface="Times New Roman" pitchFamily="34" charset="-120"/>
+              </a:rPr>
+              <a:t>A) Consequences</a:t>
+            </a:r>
+            <a:endParaRPr lang="en-US" sz="3200" dirty="0"/>
+          </a:p>
+        </p:txBody>
+      </p:sp>
+      <p:sp>
+        <p:nvSpPr>
+          <p:cNvPr id="6" name="Text 3"/>
+          <p:cNvSpPr/>
+          <p:nvPr/>
+        </p:nvSpPr>
+        <p:spPr>
+          <a:xfrm>
+            <a:off x="5349240" y="2240280"/>
+            <a:ext cx="6522415" cy="4206240"/>
           </a:xfrm>
           <a:prstGeom prst="rect">
             <a:avLst/>
@@ -14104,7 +14840,7 @@
               <a:buNone/>
             </a:pPr>
             <a:r>
-              <a:rPr lang="en-US" sz="4000" dirty="0">
+              <a:rPr lang="en-US" sz="4000" i="1" dirty="0">
                 <a:solidFill>
                   <a:srgbClr val="111111"/>
                 </a:solidFill>
@@ -14112,7 +14848,81 @@
                 <a:ea typeface="Times New Roman" pitchFamily="34" charset="-122"/>
                 <a:cs typeface="Times New Roman" pitchFamily="34" charset="-120"/>
               </a:rPr>
-              <a:t>Give two causes of deforestation in Cameroon.</a:t>
+              <a:t>Deforestation has the following consequences:</a:t>
+            </a:r>
+            <a:endParaRPr lang="en-US" sz="4000" dirty="0"/>
+          </a:p>
+          <a:p>
+            <a:pPr algn="l" indent="0" marL="0">
+              <a:spcAft>
+                <a:spcPts val="800"/>
+              </a:spcAft>
+              <a:buNone/>
+            </a:pPr>
+            <a:r>
+              <a:rPr lang="en-US" sz="4000" b="1" dirty="0">
+                <a:solidFill>
+                  <a:srgbClr val="111111"/>
+                </a:solidFill>
+                <a:latin typeface="Times New Roman" pitchFamily="34" charset="0"/>
+                <a:ea typeface="Times New Roman" pitchFamily="34" charset="-122"/>
+                <a:cs typeface="Times New Roman" pitchFamily="34" charset="-120"/>
+              </a:rPr>
+              <a:t>Soil erosion: </a:t>
+            </a:r>
+            <a:pPr algn="l" indent="0" marL="0">
+              <a:spcAft>
+                <a:spcPts val="800"/>
+              </a:spcAft>
+              <a:buNone/>
+            </a:pPr>
+            <a:r>
+              <a:rPr lang="en-US" sz="4000" dirty="0">
+                <a:solidFill>
+                  <a:srgbClr val="111111"/>
+                </a:solidFill>
+                <a:latin typeface="Times New Roman" pitchFamily="34" charset="0"/>
+                <a:ea typeface="Times New Roman" pitchFamily="34" charset="-122"/>
+                <a:cs typeface="Times New Roman" pitchFamily="34" charset="-120"/>
+              </a:rPr>
+              <a:t>Rain washes away the bare soil.</a:t>
+            </a:r>
+            <a:endParaRPr lang="en-US" sz="4000" dirty="0"/>
+          </a:p>
+          <a:p>
+            <a:pPr algn="l" indent="0" marL="0">
+              <a:spcAft>
+                <a:spcPts val="800"/>
+              </a:spcAft>
+              <a:buNone/>
+            </a:pPr>
+            <a:r>
+              <a:rPr lang="en-US" sz="4000" b="1" dirty="0">
+                <a:solidFill>
+                  <a:srgbClr val="111111"/>
+                </a:solidFill>
+                <a:latin typeface="Times New Roman" pitchFamily="34" charset="0"/>
+                <a:ea typeface="Times New Roman" pitchFamily="34" charset="-122"/>
+                <a:cs typeface="Times New Roman" pitchFamily="34" charset="-120"/>
+              </a:rPr>
+              <a:t>Loss of biodiversity: </a:t>
+            </a:r>
+            <a:pPr algn="l" indent="0" marL="0">
+              <a:spcAft>
+                <a:spcPts val="800"/>
+              </a:spcAft>
+              <a:buNone/>
+            </a:pPr>
+            <a:r>
+              <a:rPr lang="en-US" sz="4000" dirty="0">
+                <a:solidFill>
+                  <a:srgbClr val="111111"/>
+                </a:solidFill>
+                <a:latin typeface="Times New Roman" pitchFamily="34" charset="0"/>
+                <a:ea typeface="Times New Roman" pitchFamily="34" charset="-122"/>
+                <a:cs typeface="Times New Roman" pitchFamily="34" charset="-120"/>
+              </a:rPr>
+              <a:t>Plants and animals disappear.</a:t>
             </a:r>
             <a:endParaRPr lang="en-US" sz="4000" dirty="0"/>
           </a:p>
@@ -14224,7 +15034,7 @@
                 <a:ea typeface="Calibri" pitchFamily="34" charset="-122"/>
                 <a:cs typeface="Calibri" pitchFamily="34" charset="-120"/>
               </a:rPr>
-              <a:t>FORMATIVE EVALUATION</a:t>
+              <a:t>BOARD SUMMARY</a:t>
             </a:r>
             <a:endParaRPr lang="en-US" sz="1400" dirty="0"/>
           </a:p>
@@ -14289,7 +15099,7 @@
                 <a:ea typeface="Times New Roman" pitchFamily="34" charset="-122"/>
                 <a:cs typeface="Times New Roman" pitchFamily="34" charset="-120"/>
               </a:rPr>
-              <a:t>Expected Answer</a:t>
+              <a:t>2. Consequences and Solutions</a:t>
             </a:r>
             <a:endParaRPr lang="en-US" sz="3600" dirty="0"/>
           </a:p>
@@ -14303,8 +15113,47 @@
         </p:nvSpPr>
         <p:spPr>
           <a:xfrm>
-            <a:off x="5349240" y="1783080"/>
-            <a:ext cx="6522415" cy="4663440"/>
+            <a:off x="5349240" y="1737360"/>
+            <a:ext cx="6522415" cy="457200"/>
+          </a:xfrm>
+          <a:prstGeom prst="rect">
+            <a:avLst/>
+          </a:prstGeom>
+          <a:noFill/>
+          <a:ln/>
+        </p:spPr>
+        <p:txBody>
+          <a:bodyPr wrap="square" lIns="0" tIns="0" rIns="0" bIns="0" rtlCol="0" anchor="ctr"/>
+          <a:lstStyle/>
+          <a:p>
+            <a:pPr algn="l" indent="0" marL="0">
+              <a:buNone/>
+            </a:pPr>
+            <a:r>
+              <a:rPr lang="en-US" sz="3200" b="1" dirty="0">
+                <a:solidFill>
+                  <a:srgbClr val="990011"/>
+                </a:solidFill>
+                <a:latin typeface="Times New Roman" pitchFamily="34" charset="0"/>
+                <a:ea typeface="Times New Roman" pitchFamily="34" charset="-122"/>
+                <a:cs typeface="Times New Roman" pitchFamily="34" charset="-120"/>
+              </a:rPr>
+              <a:t>A) Consequences (continued)</a:t>
+            </a:r>
+            <a:endParaRPr lang="en-US" sz="3200" dirty="0"/>
+          </a:p>
+        </p:txBody>
+      </p:sp>
+      <p:sp>
+        <p:nvSpPr>
+          <p:cNvPr id="6" name="Text 3"/>
+          <p:cNvSpPr/>
+          <p:nvPr/>
+        </p:nvSpPr>
+        <p:spPr>
+          <a:xfrm>
+            <a:off x="5349240" y="2240280"/>
+            <a:ext cx="6522415" cy="4206240"/>
           </a:xfrm>
           <a:prstGeom prst="rect">
             <a:avLst/>
@@ -14323,7 +15172,7 @@
               <a:buNone/>
             </a:pPr>
             <a:r>
-              <a:rPr lang="en-US" sz="4000" dirty="0">
+              <a:rPr lang="en-US" sz="4000" b="1" dirty="0">
                 <a:solidFill>
                   <a:srgbClr val="111111"/>
                 </a:solidFill>
@@ -14331,7 +15180,61 @@
                 <a:ea typeface="Times New Roman" pitchFamily="34" charset="-122"/>
                 <a:cs typeface="Times New Roman" pitchFamily="34" charset="-120"/>
               </a:rPr>
-              <a:t>Farming and logging.</a:t>
+              <a:t>Drying rivers: </a:t>
+            </a:r>
+            <a:pPr algn="l" indent="0" marL="0">
+              <a:spcAft>
+                <a:spcPts val="800"/>
+              </a:spcAft>
+              <a:buNone/>
+            </a:pPr>
+            <a:r>
+              <a:rPr lang="en-US" sz="4000" dirty="0">
+                <a:solidFill>
+                  <a:srgbClr val="111111"/>
+                </a:solidFill>
+                <a:latin typeface="Times New Roman" pitchFamily="34" charset="0"/>
+                <a:ea typeface="Times New Roman" pitchFamily="34" charset="-122"/>
+                <a:cs typeface="Times New Roman" pitchFamily="34" charset="-120"/>
+              </a:rPr>
+              <a:t>Rivers dry up in the dry season.</a:t>
+            </a:r>
+            <a:endParaRPr lang="en-US" sz="4000" dirty="0"/>
+          </a:p>
+          <a:p>
+            <a:pPr algn="l" indent="0" marL="0">
+              <a:spcAft>
+                <a:spcPts val="800"/>
+              </a:spcAft>
+              <a:buNone/>
+            </a:pPr>
+            <a:r>
+              <a:rPr lang="en-US" sz="4000" b="1" dirty="0">
+                <a:solidFill>
+                  <a:srgbClr val="111111"/>
+                </a:solidFill>
+                <a:latin typeface="Times New Roman" pitchFamily="34" charset="0"/>
+                <a:ea typeface="Times New Roman" pitchFamily="34" charset="-122"/>
+                <a:cs typeface="Times New Roman" pitchFamily="34" charset="-120"/>
+              </a:rPr>
+              <a:t>Climate change: </a:t>
+            </a:r>
+            <a:pPr algn="l" indent="0" marL="0">
+              <a:spcAft>
+                <a:spcPts val="800"/>
+              </a:spcAft>
+              <a:buNone/>
+            </a:pPr>
+            <a:r>
+              <a:rPr lang="en-US" sz="4000" dirty="0">
+                <a:solidFill>
+                  <a:srgbClr val="111111"/>
+                </a:solidFill>
+                <a:latin typeface="Times New Roman" pitchFamily="34" charset="0"/>
+                <a:ea typeface="Times New Roman" pitchFamily="34" charset="-122"/>
+                <a:cs typeface="Times New Roman" pitchFamily="34" charset="-120"/>
+              </a:rPr>
+              <a:t>Fewer trees absorb carbon dioxide.</a:t>
             </a:r>
             <a:endParaRPr lang="en-US" sz="4000" dirty="0"/>
           </a:p>
@@ -14682,7 +15585,7 @@
                 <a:ea typeface="Calibri" pitchFamily="34" charset="-122"/>
                 <a:cs typeface="Calibri" pitchFamily="34" charset="-120"/>
               </a:rPr>
-              <a:t>FORMATIVE EVALUATION</a:t>
+              <a:t>BOARD SUMMARY</a:t>
             </a:r>
             <a:endParaRPr lang="en-US" sz="1400" dirty="0"/>
           </a:p>
@@ -14747,7 +15650,7 @@
                 <a:ea typeface="Times New Roman" pitchFamily="34" charset="-122"/>
                 <a:cs typeface="Times New Roman" pitchFamily="34" charset="-120"/>
               </a:rPr>
-              <a:t>Evaluation 2</a:t>
+              <a:t>2. Consequences and Solutions</a:t>
             </a:r>
             <a:endParaRPr lang="en-US" sz="3600" dirty="0"/>
           </a:p>
@@ -14761,8 +15664,47 @@
         </p:nvSpPr>
         <p:spPr>
           <a:xfrm>
-            <a:off x="5349240" y="1783080"/>
-            <a:ext cx="6522415" cy="4663440"/>
+            <a:off x="5349240" y="1737360"/>
+            <a:ext cx="6522415" cy="457200"/>
+          </a:xfrm>
+          <a:prstGeom prst="rect">
+            <a:avLst/>
+          </a:prstGeom>
+          <a:noFill/>
+          <a:ln/>
+        </p:spPr>
+        <p:txBody>
+          <a:bodyPr wrap="square" lIns="0" tIns="0" rIns="0" bIns="0" rtlCol="0" anchor="ctr"/>
+          <a:lstStyle/>
+          <a:p>
+            <a:pPr algn="l" indent="0" marL="0">
+              <a:buNone/>
+            </a:pPr>
+            <a:r>
+              <a:rPr lang="en-US" sz="3200" b="1" dirty="0">
+                <a:solidFill>
+                  <a:srgbClr val="990011"/>
+                </a:solidFill>
+                <a:latin typeface="Times New Roman" pitchFamily="34" charset="0"/>
+                <a:ea typeface="Times New Roman" pitchFamily="34" charset="-122"/>
+                <a:cs typeface="Times New Roman" pitchFamily="34" charset="-120"/>
+              </a:rPr>
+              <a:t>B) Solutions</a:t>
+            </a:r>
+            <a:endParaRPr lang="en-US" sz="3200" dirty="0"/>
+          </a:p>
+        </p:txBody>
+      </p:sp>
+      <p:sp>
+        <p:nvSpPr>
+          <p:cNvPr id="6" name="Text 3"/>
+          <p:cNvSpPr/>
+          <p:nvPr/>
+        </p:nvSpPr>
+        <p:spPr>
+          <a:xfrm>
+            <a:off x="5349240" y="2240280"/>
+            <a:ext cx="6522415" cy="4206240"/>
           </a:xfrm>
           <a:prstGeom prst="rect">
             <a:avLst/>
@@ -14781,7 +15723,7 @@
               <a:buNone/>
             </a:pPr>
             <a:r>
-              <a:rPr lang="en-US" sz="4000" dirty="0">
+              <a:rPr lang="en-US" sz="4000" i="1" dirty="0">
                 <a:solidFill>
                   <a:srgbClr val="111111"/>
                 </a:solidFill>
@@ -14789,7 +15731,81 @@
                 <a:ea typeface="Times New Roman" pitchFamily="34" charset="-122"/>
                 <a:cs typeface="Times New Roman" pitchFamily="34" charset="-120"/>
               </a:rPr>
-              <a:t>Give two solutions.</a:t>
+              <a:t>Deforestation is reduced by the following solutions:</a:t>
+            </a:r>
+            <a:endParaRPr lang="en-US" sz="4000" dirty="0"/>
+          </a:p>
+          <a:p>
+            <a:pPr algn="l" indent="0" marL="0">
+              <a:spcAft>
+                <a:spcPts val="800"/>
+              </a:spcAft>
+              <a:buNone/>
+            </a:pPr>
+            <a:r>
+              <a:rPr lang="en-US" sz="4000" b="1" dirty="0">
+                <a:solidFill>
+                  <a:srgbClr val="111111"/>
+                </a:solidFill>
+                <a:latin typeface="Times New Roman" pitchFamily="34" charset="0"/>
+                <a:ea typeface="Times New Roman" pitchFamily="34" charset="-122"/>
+                <a:cs typeface="Times New Roman" pitchFamily="34" charset="-120"/>
+              </a:rPr>
+              <a:t>Reforestation: </a:t>
+            </a:r>
+            <a:pPr algn="l" indent="0" marL="0">
+              <a:spcAft>
+                <a:spcPts val="800"/>
+              </a:spcAft>
+              <a:buNone/>
+            </a:pPr>
+            <a:r>
+              <a:rPr lang="en-US" sz="4000" dirty="0">
+                <a:solidFill>
+                  <a:srgbClr val="111111"/>
+                </a:solidFill>
+                <a:latin typeface="Times New Roman" pitchFamily="34" charset="0"/>
+                <a:ea typeface="Times New Roman" pitchFamily="34" charset="-122"/>
+                <a:cs typeface="Times New Roman" pitchFamily="34" charset="-120"/>
+              </a:rPr>
+              <a:t>Trees are planted again.</a:t>
+            </a:r>
+            <a:endParaRPr lang="en-US" sz="4000" dirty="0"/>
+          </a:p>
+          <a:p>
+            <a:pPr algn="l" indent="0" marL="0">
+              <a:spcAft>
+                <a:spcPts val="800"/>
+              </a:spcAft>
+              <a:buNone/>
+            </a:pPr>
+            <a:r>
+              <a:rPr lang="en-US" sz="4000" b="1" dirty="0">
+                <a:solidFill>
+                  <a:srgbClr val="111111"/>
+                </a:solidFill>
+                <a:latin typeface="Times New Roman" pitchFamily="34" charset="0"/>
+                <a:ea typeface="Times New Roman" pitchFamily="34" charset="-122"/>
+                <a:cs typeface="Times New Roman" pitchFamily="34" charset="-120"/>
+              </a:rPr>
+              <a:t>Protected areas: </a:t>
+            </a:r>
+            <a:pPr algn="l" indent="0" marL="0">
+              <a:spcAft>
+                <a:spcPts val="800"/>
+              </a:spcAft>
+              <a:buNone/>
+            </a:pPr>
+            <a:r>
+              <a:rPr lang="en-US" sz="4000" dirty="0">
+                <a:solidFill>
+                  <a:srgbClr val="111111"/>
+                </a:solidFill>
+                <a:latin typeface="Times New Roman" pitchFamily="34" charset="0"/>
+                <a:ea typeface="Times New Roman" pitchFamily="34" charset="-122"/>
+                <a:cs typeface="Times New Roman" pitchFamily="34" charset="-120"/>
+              </a:rPr>
+              <a:t>Parks and reserves protect forests.</a:t>
             </a:r>
             <a:endParaRPr lang="en-US" sz="4000" dirty="0"/>
           </a:p>
@@ -14901,7 +15917,7 @@
                 <a:ea typeface="Calibri" pitchFamily="34" charset="-122"/>
                 <a:cs typeface="Calibri" pitchFamily="34" charset="-120"/>
               </a:rPr>
-              <a:t>FORMATIVE EVALUATION</a:t>
+              <a:t>BOARD SUMMARY</a:t>
             </a:r>
             <a:endParaRPr lang="en-US" sz="1400" dirty="0"/>
           </a:p>
@@ -14966,7 +15982,7 @@
                 <a:ea typeface="Times New Roman" pitchFamily="34" charset="-122"/>
                 <a:cs typeface="Times New Roman" pitchFamily="34" charset="-120"/>
               </a:rPr>
-              <a:t>Expected Answer</a:t>
+              <a:t>2. Consequences and Solutions</a:t>
             </a:r>
             <a:endParaRPr lang="en-US" sz="3600" dirty="0"/>
           </a:p>
@@ -14980,8 +15996,47 @@
         </p:nvSpPr>
         <p:spPr>
           <a:xfrm>
-            <a:off x="5349240" y="1783080"/>
-            <a:ext cx="6522415" cy="4663440"/>
+            <a:off x="5349240" y="1737360"/>
+            <a:ext cx="6522415" cy="457200"/>
+          </a:xfrm>
+          <a:prstGeom prst="rect">
+            <a:avLst/>
+          </a:prstGeom>
+          <a:noFill/>
+          <a:ln/>
+        </p:spPr>
+        <p:txBody>
+          <a:bodyPr wrap="square" lIns="0" tIns="0" rIns="0" bIns="0" rtlCol="0" anchor="ctr"/>
+          <a:lstStyle/>
+          <a:p>
+            <a:pPr algn="l" indent="0" marL="0">
+              <a:buNone/>
+            </a:pPr>
+            <a:r>
+              <a:rPr lang="en-US" sz="3200" b="1" dirty="0">
+                <a:solidFill>
+                  <a:srgbClr val="990011"/>
+                </a:solidFill>
+                <a:latin typeface="Times New Roman" pitchFamily="34" charset="0"/>
+                <a:ea typeface="Times New Roman" pitchFamily="34" charset="-122"/>
+                <a:cs typeface="Times New Roman" pitchFamily="34" charset="-120"/>
+              </a:rPr>
+              <a:t>B) Solutions (continued)</a:t>
+            </a:r>
+            <a:endParaRPr lang="en-US" sz="3200" dirty="0"/>
+          </a:p>
+        </p:txBody>
+      </p:sp>
+      <p:sp>
+        <p:nvSpPr>
+          <p:cNvPr id="6" name="Text 3"/>
+          <p:cNvSpPr/>
+          <p:nvPr/>
+        </p:nvSpPr>
+        <p:spPr>
+          <a:xfrm>
+            <a:off x="5349240" y="2240280"/>
+            <a:ext cx="6522415" cy="4206240"/>
           </a:xfrm>
           <a:prstGeom prst="rect">
             <a:avLst/>
@@ -15000,7 +16055,7 @@
               <a:buNone/>
             </a:pPr>
             <a:r>
-              <a:rPr lang="en-US" sz="4000" dirty="0">
+              <a:rPr lang="en-US" sz="4000" b="1" dirty="0">
                 <a:solidFill>
                   <a:srgbClr val="111111"/>
                 </a:solidFill>
@@ -15008,7 +16063,61 @@
                 <a:ea typeface="Times New Roman" pitchFamily="34" charset="-122"/>
                 <a:cs typeface="Times New Roman" pitchFamily="34" charset="-120"/>
               </a:rPr>
-              <a:t>Reforestation and protected areas.</a:t>
+              <a:t>Enforcement of the Forestry Law: </a:t>
+            </a:r>
+            <a:pPr algn="l" indent="0" marL="0">
+              <a:spcAft>
+                <a:spcPts val="800"/>
+              </a:spcAft>
+              <a:buNone/>
+            </a:pPr>
+            <a:r>
+              <a:rPr lang="en-US" sz="4000" dirty="0">
+                <a:solidFill>
+                  <a:srgbClr val="111111"/>
+                </a:solidFill>
+                <a:latin typeface="Times New Roman" pitchFamily="34" charset="0"/>
+                <a:ea typeface="Times New Roman" pitchFamily="34" charset="-122"/>
+                <a:cs typeface="Times New Roman" pitchFamily="34" charset="-120"/>
+              </a:rPr>
+              <a:t>Illegal logging is punished.</a:t>
+            </a:r>
+            <a:endParaRPr lang="en-US" sz="4000" dirty="0"/>
+          </a:p>
+          <a:p>
+            <a:pPr algn="l" indent="0" marL="0">
+              <a:spcAft>
+                <a:spcPts val="800"/>
+              </a:spcAft>
+              <a:buNone/>
+            </a:pPr>
+            <a:r>
+              <a:rPr lang="en-US" sz="4000" b="1" dirty="0">
+                <a:solidFill>
+                  <a:srgbClr val="111111"/>
+                </a:solidFill>
+                <a:latin typeface="Times New Roman" pitchFamily="34" charset="0"/>
+                <a:ea typeface="Times New Roman" pitchFamily="34" charset="-122"/>
+                <a:cs typeface="Times New Roman" pitchFamily="34" charset="-120"/>
+              </a:rPr>
+              <a:t>Improved stoves: </a:t>
+            </a:r>
+            <a:pPr algn="l" indent="0" marL="0">
+              <a:spcAft>
+                <a:spcPts val="800"/>
+              </a:spcAft>
+              <a:buNone/>
+            </a:pPr>
+            <a:r>
+              <a:rPr lang="en-US" sz="4000" dirty="0">
+                <a:solidFill>
+                  <a:srgbClr val="111111"/>
+                </a:solidFill>
+                <a:latin typeface="Times New Roman" pitchFamily="34" charset="0"/>
+                <a:ea typeface="Times New Roman" pitchFamily="34" charset="-122"/>
+                <a:cs typeface="Times New Roman" pitchFamily="34" charset="-120"/>
+              </a:rPr>
+              <a:t>They use less wood.</a:t>
             </a:r>
             <a:endParaRPr lang="en-US" sz="4000" dirty="0"/>
           </a:p>
@@ -15120,15 +16229,54 @@
                 <a:ea typeface="Calibri" pitchFamily="34" charset="-122"/>
                 <a:cs typeface="Calibri" pitchFamily="34" charset="-120"/>
               </a:rPr>
-              <a:t>REMEDIATION</a:t>
+              <a:t>BOARD SUMMARY</a:t>
             </a:r>
             <a:endParaRPr lang="en-US" sz="1400" dirty="0"/>
+          </a:p>
+        </p:txBody>
+      </p:sp>
+      <p:sp>
+        <p:nvSpPr>
+          <p:cNvPr id="3" name="Text 1"/>
+          <p:cNvSpPr/>
+          <p:nvPr/>
+        </p:nvSpPr>
+        <p:spPr>
+          <a:xfrm>
+            <a:off x="457200" y="1005840"/>
+            <a:ext cx="11277295" cy="731520"/>
+          </a:xfrm>
+          <a:prstGeom prst="rect">
+            <a:avLst/>
+          </a:prstGeom>
+          <a:noFill/>
+          <a:ln/>
+        </p:spPr>
+        <p:txBody>
+          <a:bodyPr wrap="square" lIns="0" tIns="0" rIns="0" bIns="0" rtlCol="0" anchor="ctr"/>
+          <a:lstStyle/>
+          <a:p>
+            <a:pPr algn="ctr" indent="0" marL="0">
+              <a:buNone/>
+            </a:pPr>
+            <a:r>
+              <a:rPr lang="en-US" sz="3600" b="1" dirty="0">
+                <a:solidFill>
+                  <a:srgbClr val="990011"/>
+                </a:solidFill>
+                <a:latin typeface="Times New Roman" pitchFamily="34" charset="0"/>
+                <a:ea typeface="Times New Roman" pitchFamily="34" charset="-122"/>
+                <a:cs typeface="Times New Roman" pitchFamily="34" charset="-120"/>
+              </a:rPr>
+              <a:t>2. Consequences and Solutions</a:t>
+            </a:r>
+            <a:endParaRPr lang="en-US" sz="3600" dirty="0"/>
           </a:p>
         </p:txBody>
       </p:sp>
       <p:pic>
         <p:nvPicPr>
-          <p:cNvPr id="3" name="Image 0" descr="/home/claude/f4/img/minesec_sheet.png">    </p:cNvPr>
+          <p:cNvPr id="4" name="Image 0" descr="/home/claude/f4/img/v2/cmr_forest_big.png">    </p:cNvPr>
           <p:cNvPicPr>
             <a:picLocks noChangeAspect="1"/>
           </p:cNvPicPr>
@@ -15142,8 +16290,8 @@
         </p:blipFill>
         <p:spPr>
           <a:xfrm>
-            <a:off x="0" y="658368"/>
-            <a:ext cx="3840480" cy="5833872"/>
+            <a:off x="1825600" y="1783080"/>
+            <a:ext cx="8540496" cy="4270248"/>
           </a:xfrm>
           <a:prstGeom prst="rect">
             <a:avLst/>
@@ -15152,14 +16300,14 @@
       </p:pic>
       <p:sp>
         <p:nvSpPr>
-          <p:cNvPr id="4" name="Text 1"/>
+          <p:cNvPr id="5" name="Text 2"/>
           <p:cNvSpPr/>
           <p:nvPr/>
         </p:nvSpPr>
         <p:spPr>
           <a:xfrm>
-            <a:off x="4069080" y="1005840"/>
-            <a:ext cx="7802575" cy="731520"/>
+            <a:off x="457200" y="6089904"/>
+            <a:ext cx="11277295" cy="347472"/>
           </a:xfrm>
           <a:prstGeom prst="rect">
             <a:avLst/>
@@ -15168,134 +16316,24 @@
           <a:ln/>
         </p:spPr>
         <p:txBody>
-          <a:bodyPr wrap="square" lIns="0" tIns="0" rIns="0" bIns="0" rtlCol="0" anchor="ctr">
-            <a:normAutofit/>
-          </a:bodyPr>
+          <a:bodyPr wrap="square" lIns="0" tIns="0" rIns="0" bIns="0" rtlCol="0" anchor="ctr"/>
           <a:lstStyle/>
           <a:p>
             <a:pPr algn="ctr" indent="0" marL="0">
               <a:buNone/>
             </a:pPr>
             <a:r>
-              <a:rPr lang="en-US" sz="3600" b="1" dirty="0">
-                <a:solidFill>
-                  <a:srgbClr val="990011"/>
+              <a:rPr lang="en-US" sz="1800" i="1" dirty="0">
+                <a:solidFill>
+                  <a:srgbClr val="555555"/>
                 </a:solidFill>
                 <a:latin typeface="Times New Roman" pitchFamily="34" charset="0"/>
                 <a:ea typeface="Times New Roman" pitchFamily="34" charset="-122"/>
                 <a:cs typeface="Times New Roman" pitchFamily="34" charset="-120"/>
               </a:rPr>
-              <a:t>Remediation</a:t>
-            </a:r>
-            <a:endParaRPr lang="en-US" sz="3600" dirty="0"/>
-          </a:p>
-        </p:txBody>
-      </p:sp>
-      <p:sp>
-        <p:nvSpPr>
-          <p:cNvPr id="5" name="Text 2"/>
-          <p:cNvSpPr/>
-          <p:nvPr/>
-        </p:nvSpPr>
-        <p:spPr>
-          <a:xfrm>
-            <a:off x="4069080" y="1783080"/>
-            <a:ext cx="7802575" cy="4663440"/>
-          </a:xfrm>
-          <a:prstGeom prst="rect">
-            <a:avLst/>
-          </a:prstGeom>
-          <a:noFill/>
-          <a:ln/>
-        </p:spPr>
-        <p:txBody>
-          <a:bodyPr wrap="square" lIns="0" tIns="0" rIns="0" bIns="0" rtlCol="0" anchor="t"/>
-          <a:lstStyle/>
-          <a:p>
-            <a:pPr algn="l" indent="0" marL="0">
-              <a:spcAft>
-                <a:spcPts val="800"/>
-              </a:spcAft>
-              <a:buNone/>
-            </a:pPr>
-            <a:r>
-              <a:rPr lang="en-US" sz="4000" b="1" dirty="0">
-                <a:solidFill>
-                  <a:srgbClr val="111111"/>
-                </a:solidFill>
-                <a:latin typeface="Times New Roman" pitchFamily="34" charset="0"/>
-                <a:ea typeface="Times New Roman" pitchFamily="34" charset="-122"/>
-                <a:cs typeface="Times New Roman" pitchFamily="34" charset="-120"/>
-              </a:rPr>
-              <a:t>Fill in the blanks:</a:t>
-            </a:r>
-            <a:endParaRPr lang="en-US" sz="4000" dirty="0"/>
-          </a:p>
-          <a:p>
-            <a:pPr algn="l" marL="342900" indent="-342900">
-              <a:spcAft>
-                <a:spcPts val="800"/>
-              </a:spcAft>
-              <a:buSzPct val="100000"/>
-              <a:buFont typeface="+mj-lt"/>
-              <a:buAutoNum type="arabicPeriod" startAt="1"/>
-            </a:pPr>
-            <a:r>
-              <a:rPr lang="en-US" sz="4000" dirty="0">
-                <a:solidFill>
-                  <a:srgbClr val="111111"/>
-                </a:solidFill>
-                <a:latin typeface="Times New Roman" pitchFamily="34" charset="0"/>
-                <a:ea typeface="Times New Roman" pitchFamily="34" charset="-122"/>
-                <a:cs typeface="Times New Roman" pitchFamily="34" charset="-120"/>
-              </a:rPr>
-              <a:t>The destruction of forests is ______.</a:t>
-            </a:r>
-            <a:endParaRPr lang="en-US" sz="4000" dirty="0"/>
-          </a:p>
-          <a:p>
-            <a:pPr algn="l" marL="342900" indent="-342900">
-              <a:spcAft>
-                <a:spcPts val="800"/>
-              </a:spcAft>
-              <a:buSzPct val="100000"/>
-              <a:buFont typeface="+mj-lt"/>
-              <a:buAutoNum type="arabicPeriod" startAt="1"/>
-            </a:pPr>
-            <a:r>
-              <a:rPr lang="en-US" sz="4000" dirty="0">
-                <a:solidFill>
-                  <a:srgbClr val="111111"/>
-                </a:solidFill>
-                <a:latin typeface="Times New Roman" pitchFamily="34" charset="0"/>
-                <a:ea typeface="Times New Roman" pitchFamily="34" charset="-122"/>
-                <a:cs typeface="Times New Roman" pitchFamily="34" charset="-120"/>
-              </a:rPr>
-              <a:t>The Dja is a forest ______.</a:t>
-            </a:r>
-            <a:endParaRPr lang="en-US" sz="4000" dirty="0"/>
-          </a:p>
-          <a:p>
-            <a:pPr algn="l" marL="342900" indent="-342900">
-              <a:spcAft>
-                <a:spcPts val="800"/>
-              </a:spcAft>
-              <a:buSzPct val="100000"/>
-              <a:buFont typeface="+mj-lt"/>
-              <a:buAutoNum type="arabicPeriod" startAt="1"/>
-            </a:pPr>
-            <a:r>
-              <a:rPr lang="en-US" sz="4000" dirty="0">
-                <a:solidFill>
-                  <a:srgbClr val="111111"/>
-                </a:solidFill>
-                <a:latin typeface="Times New Roman" pitchFamily="34" charset="0"/>
-                <a:ea typeface="Times New Roman" pitchFamily="34" charset="-122"/>
-                <a:cs typeface="Times New Roman" pitchFamily="34" charset="-120"/>
-              </a:rPr>
-              <a:t>Stoves that use less wood are ______ stoves.</a:t>
-            </a:r>
-            <a:endParaRPr lang="en-US" sz="4000" dirty="0"/>
+              <a:t>Illustration: forests and protected areas</a:t>
+            </a:r>
+            <a:endParaRPr lang="en-US" sz="1800" dirty="0"/>
           </a:p>
         </p:txBody>
       </p:sp>
@@ -15405,7 +16443,7 @@
                 <a:ea typeface="Calibri" pitchFamily="34" charset="-122"/>
                 <a:cs typeface="Calibri" pitchFamily="34" charset="-120"/>
               </a:rPr>
-              <a:t>HOMEWORK</a:t>
+              <a:t>FORMATIVE EVALUATION</a:t>
             </a:r>
             <a:endParaRPr lang="en-US" sz="1400" dirty="0"/>
           </a:p>
@@ -15470,7 +16508,7 @@
                 <a:ea typeface="Times New Roman" pitchFamily="34" charset="-122"/>
                 <a:cs typeface="Times New Roman" pitchFamily="34" charset="-120"/>
               </a:rPr>
-              <a:t>Homework</a:t>
+              <a:t>Evaluation 1</a:t>
             </a:r>
             <a:endParaRPr lang="en-US" sz="3600" dirty="0"/>
           </a:p>
@@ -15512,7 +16550,7 @@
                 <a:ea typeface="Times New Roman" pitchFamily="34" charset="-122"/>
                 <a:cs typeface="Times New Roman" pitchFamily="34" charset="-120"/>
               </a:rPr>
-              <a:t>Write three things your school can do against deforestation.</a:t>
+              <a:t>Give two causes of deforestation in Cameroon.</a:t>
             </a:r>
             <a:endParaRPr lang="en-US" sz="4000" dirty="0"/>
           </a:p>
@@ -15624,7 +16662,7 @@
                 <a:ea typeface="Calibri" pitchFamily="34" charset="-122"/>
                 <a:cs typeface="Calibri" pitchFamily="34" charset="-120"/>
               </a:rPr>
-              <a:t>NEXT LESSON</a:t>
+              <a:t>FORMATIVE EVALUATION</a:t>
             </a:r>
             <a:endParaRPr lang="en-US" sz="1400" dirty="0"/>
           </a:p>
@@ -15689,7 +16727,7 @@
                 <a:ea typeface="Times New Roman" pitchFamily="34" charset="-122"/>
                 <a:cs typeface="Times New Roman" pitchFamily="34" charset="-120"/>
               </a:rPr>
-              <a:t>Next Lesson</a:t>
+              <a:t>Expected Answer</a:t>
             </a:r>
             <a:endParaRPr lang="en-US" sz="3600" dirty="0"/>
           </a:p>
@@ -15713,17 +16751,17 @@
           <a:ln/>
         </p:spPr>
         <p:txBody>
-          <a:bodyPr wrap="square" lIns="0" tIns="0" rIns="0" bIns="0" rtlCol="0" anchor="ctr"/>
-          <a:lstStyle/>
-          <a:p>
-            <a:pPr algn="ctr" indent="0" marL="0">
+          <a:bodyPr wrap="square" lIns="0" tIns="0" rIns="0" bIns="0" rtlCol="0" anchor="t"/>
+          <a:lstStyle/>
+          <a:p>
+            <a:pPr algn="l" indent="0" marL="0">
               <a:spcAft>
                 <a:spcPts val="800"/>
               </a:spcAft>
               <a:buNone/>
             </a:pPr>
             <a:r>
-              <a:rPr lang="en-US" sz="4000" b="1" dirty="0">
+              <a:rPr lang="en-US" sz="4000" dirty="0">
                 <a:solidFill>
                   <a:srgbClr val="111111"/>
                 </a:solidFill>
@@ -15731,27 +16769,7 @@
                 <a:ea typeface="Times New Roman" pitchFamily="34" charset="-122"/>
                 <a:cs typeface="Times New Roman" pitchFamily="34" charset="-120"/>
               </a:rPr>
-              <a:t>Our next lesson will be on:</a:t>
-            </a:r>
-            <a:endParaRPr lang="en-US" sz="4000" dirty="0"/>
-          </a:p>
-          <a:p>
-            <a:pPr algn="ctr" indent="0" marL="0">
-              <a:spcAft>
-                <a:spcPts val="800"/>
-              </a:spcAft>
-              <a:buNone/>
-            </a:pPr>
-            <a:r>
-              <a:rPr lang="en-US" sz="4000" b="1" dirty="0">
-                <a:solidFill>
-                  <a:srgbClr val="990011"/>
-                </a:solidFill>
-                <a:latin typeface="Times New Roman" pitchFamily="34" charset="0"/>
-                <a:ea typeface="Times New Roman" pitchFamily="34" charset="-122"/>
-                <a:cs typeface="Times New Roman" pitchFamily="34" charset="-120"/>
-              </a:rPr>
-              <a:t>Practical Work 10: Description of Vegetation on Maps</a:t>
+              <a:t>Farming and logging.</a:t>
             </a:r>
             <a:endParaRPr lang="en-US" sz="4000" dirty="0"/>
           </a:p>
@@ -15863,6 +16881,1406 @@
                 <a:ea typeface="Calibri" pitchFamily="34" charset="-122"/>
                 <a:cs typeface="Calibri" pitchFamily="34" charset="-120"/>
               </a:rPr>
+              <a:t>FORMATIVE EVALUATION</a:t>
+            </a:r>
+            <a:endParaRPr lang="en-US" sz="1400" dirty="0"/>
+          </a:p>
+        </p:txBody>
+      </p:sp>
+      <p:pic>
+        <p:nvPicPr>
+          <p:cNvPr id="3" name="Image 0" descr="/home/claude/f4/img/minesec_sheet.png">    </p:cNvPr>
+          <p:cNvPicPr>
+            <a:picLocks noChangeAspect="1"/>
+          </p:cNvPicPr>
+          <p:nvPr/>
+        </p:nvPicPr>
+        <p:blipFill>
+          <a:blip r:embed="rId1"/>
+          <a:stretch>
+            <a:fillRect/>
+          </a:stretch>
+        </p:blipFill>
+        <p:spPr>
+          <a:xfrm>
+            <a:off x="0" y="658368"/>
+            <a:ext cx="5120640" cy="5833872"/>
+          </a:xfrm>
+          <a:prstGeom prst="rect">
+            <a:avLst/>
+          </a:prstGeom>
+        </p:spPr>
+      </p:pic>
+      <p:sp>
+        <p:nvSpPr>
+          <p:cNvPr id="4" name="Text 1"/>
+          <p:cNvSpPr/>
+          <p:nvPr/>
+        </p:nvSpPr>
+        <p:spPr>
+          <a:xfrm>
+            <a:off x="5349240" y="1005840"/>
+            <a:ext cx="6522415" cy="731520"/>
+          </a:xfrm>
+          <a:prstGeom prst="rect">
+            <a:avLst/>
+          </a:prstGeom>
+          <a:noFill/>
+          <a:ln/>
+        </p:spPr>
+        <p:txBody>
+          <a:bodyPr wrap="square" lIns="0" tIns="0" rIns="0" bIns="0" rtlCol="0" anchor="ctr">
+            <a:normAutofit/>
+          </a:bodyPr>
+          <a:lstStyle/>
+          <a:p>
+            <a:pPr algn="ctr" indent="0" marL="0">
+              <a:buNone/>
+            </a:pPr>
+            <a:r>
+              <a:rPr lang="en-US" sz="3600" b="1" dirty="0">
+                <a:solidFill>
+                  <a:srgbClr val="990011"/>
+                </a:solidFill>
+                <a:latin typeface="Times New Roman" pitchFamily="34" charset="0"/>
+                <a:ea typeface="Times New Roman" pitchFamily="34" charset="-122"/>
+                <a:cs typeface="Times New Roman" pitchFamily="34" charset="-120"/>
+              </a:rPr>
+              <a:t>Evaluation 2</a:t>
+            </a:r>
+            <a:endParaRPr lang="en-US" sz="3600" dirty="0"/>
+          </a:p>
+        </p:txBody>
+      </p:sp>
+      <p:sp>
+        <p:nvSpPr>
+          <p:cNvPr id="5" name="Text 2"/>
+          <p:cNvSpPr/>
+          <p:nvPr/>
+        </p:nvSpPr>
+        <p:spPr>
+          <a:xfrm>
+            <a:off x="5349240" y="1783080"/>
+            <a:ext cx="6522415" cy="4663440"/>
+          </a:xfrm>
+          <a:prstGeom prst="rect">
+            <a:avLst/>
+          </a:prstGeom>
+          <a:noFill/>
+          <a:ln/>
+        </p:spPr>
+        <p:txBody>
+          <a:bodyPr wrap="square" lIns="0" tIns="0" rIns="0" bIns="0" rtlCol="0" anchor="t"/>
+          <a:lstStyle/>
+          <a:p>
+            <a:pPr algn="l" indent="0" marL="0">
+              <a:spcAft>
+                <a:spcPts val="800"/>
+              </a:spcAft>
+              <a:buNone/>
+            </a:pPr>
+            <a:r>
+              <a:rPr lang="en-US" sz="4000" dirty="0">
+                <a:solidFill>
+                  <a:srgbClr val="111111"/>
+                </a:solidFill>
+                <a:latin typeface="Times New Roman" pitchFamily="34" charset="0"/>
+                <a:ea typeface="Times New Roman" pitchFamily="34" charset="-122"/>
+                <a:cs typeface="Times New Roman" pitchFamily="34" charset="-120"/>
+              </a:rPr>
+              <a:t>Give two solutions.</a:t>
+            </a:r>
+            <a:endParaRPr lang="en-US" sz="4000" dirty="0"/>
+          </a:p>
+        </p:txBody>
+      </p:sp>
+      <p:sp>
+        <p:nvSpPr>
+          <p:cNvPr id="25" name="Slide Number Placeholder 0"/>
+          <p:cNvSpPr>
+            <a:spLocks noGrp="1"/>
+          </p:cNvSpPr>
+          <p:nvPr>
+            <p:ph type="sldNum" sz="quarter" idx="4294967295"/>
+          </p:nvPr>
+        </p:nvSpPr>
+        <p:spPr>
+          <a:xfrm>
+            <a:off x="27432" y="91440"/>
+            <a:ext cx="585216" cy="475488"/>
+          </a:xfrm>
+          <a:prstGeom prst="rect">
+            <a:avLst/>
+          </a:prstGeom>
+          <a:extLst>
+            <a:ext uri="{C572A759-6A51-4108-AA02-DFA0A04FC94B}">
+              <ma14:wrappingTextBoxFlag xmlns:ma14="http://schemas.microsoft.com/office/mac/drawingml/2011/main" val="0"/>
+            </a:ext>
+          </a:extLst>
+        </p:spPr>
+        <p:txBody>
+          <a:bodyPr/>
+          <a:lstStyle>
+            <a:lvl1pPr>
+              <a:defRPr sz="2000">
+                <a:solidFill>
+                  <a:srgbClr val="FFFFFF"/>
+                </a:solidFill>
+                <a:latin typeface="Calibri"/>
+                <a:ea typeface="Calibri"/>
+                <a:cs typeface="Calibri"/>
+              </a:defRPr>
+            </a:lvl1pPr>
+          </a:lstStyle>
+          <a:p>
+            <a:pPr algn="ctr"/>
+            <a:fld id="{F7021451-1387-4CA6-816F-3879F97B5CBC}" type="slidenum">
+              <a:rPr b="1" lang="en-US"/>
+              <a:t>45</a:t>
+            </a:fld>
+            <a:endParaRPr lang="en-US"/>
+          </a:p>
+        </p:txBody>
+      </p:sp>
+    </p:spTree>
+  </p:cSld>
+  <p:clrMapOvr>
+    <a:masterClrMapping/>
+  </p:clrMapOvr>
+</p:sld>
+</file>
+
+<file path=ppt/slides/slide46.xml><?xml version="1.0" encoding="utf-8"?>
+<p:sld xmlns:a="http://schemas.openxmlformats.org/drawingml/2006/main" xmlns:r="http://schemas.openxmlformats.org/officeDocument/2006/relationships" xmlns:p="http://schemas.openxmlformats.org/presentationml/2006/main">
+  <p:cSld name="Slide 46">
+    <p:spTree>
+      <p:nvGrpSpPr>
+        <p:cNvPr id="1" name=""/>
+        <p:cNvGrpSpPr/>
+        <p:nvPr/>
+      </p:nvGrpSpPr>
+      <p:grpSpPr>
+        <a:xfrm>
+          <a:off x="0" y="0"/>
+          <a:ext cx="0" cy="0"/>
+          <a:chOff x="0" y="0"/>
+          <a:chExt cx="0" cy="0"/>
+        </a:xfrm>
+      </p:grpSpPr>
+      <p:sp>
+        <p:nvSpPr>
+          <p:cNvPr id="2" name="Text 0"/>
+          <p:cNvSpPr/>
+          <p:nvPr/>
+        </p:nvSpPr>
+        <p:spPr>
+          <a:xfrm>
+            <a:off x="457200" y="713232"/>
+            <a:ext cx="11368735" cy="274320"/>
+          </a:xfrm>
+          <a:prstGeom prst="rect">
+            <a:avLst/>
+          </a:prstGeom>
+          <a:noFill/>
+          <a:ln/>
+        </p:spPr>
+        <p:txBody>
+          <a:bodyPr wrap="square" lIns="0" tIns="0" rIns="0" bIns="0" rtlCol="0" anchor="ctr"/>
+          <a:lstStyle/>
+          <a:p>
+            <a:pPr algn="r" indent="0" marL="0">
+              <a:buNone/>
+            </a:pPr>
+            <a:r>
+              <a:rPr lang="en-US" sz="1400" b="1" dirty="0">
+                <a:solidFill>
+                  <a:srgbClr val="1C3F6E"/>
+                </a:solidFill>
+                <a:latin typeface="Calibri" pitchFamily="34" charset="0"/>
+                <a:ea typeface="Calibri" pitchFamily="34" charset="-122"/>
+                <a:cs typeface="Calibri" pitchFamily="34" charset="-120"/>
+              </a:rPr>
+              <a:t>FORMATIVE EVALUATION</a:t>
+            </a:r>
+            <a:endParaRPr lang="en-US" sz="1400" dirty="0"/>
+          </a:p>
+        </p:txBody>
+      </p:sp>
+      <p:pic>
+        <p:nvPicPr>
+          <p:cNvPr id="3" name="Image 0" descr="/home/claude/f4/img/minesec_sheet.png">    </p:cNvPr>
+          <p:cNvPicPr>
+            <a:picLocks noChangeAspect="1"/>
+          </p:cNvPicPr>
+          <p:nvPr/>
+        </p:nvPicPr>
+        <p:blipFill>
+          <a:blip r:embed="rId1"/>
+          <a:stretch>
+            <a:fillRect/>
+          </a:stretch>
+        </p:blipFill>
+        <p:spPr>
+          <a:xfrm>
+            <a:off x="0" y="658368"/>
+            <a:ext cx="5120640" cy="5833872"/>
+          </a:xfrm>
+          <a:prstGeom prst="rect">
+            <a:avLst/>
+          </a:prstGeom>
+        </p:spPr>
+      </p:pic>
+      <p:sp>
+        <p:nvSpPr>
+          <p:cNvPr id="4" name="Text 1"/>
+          <p:cNvSpPr/>
+          <p:nvPr/>
+        </p:nvSpPr>
+        <p:spPr>
+          <a:xfrm>
+            <a:off x="5349240" y="1005840"/>
+            <a:ext cx="6522415" cy="731520"/>
+          </a:xfrm>
+          <a:prstGeom prst="rect">
+            <a:avLst/>
+          </a:prstGeom>
+          <a:noFill/>
+          <a:ln/>
+        </p:spPr>
+        <p:txBody>
+          <a:bodyPr wrap="square" lIns="0" tIns="0" rIns="0" bIns="0" rtlCol="0" anchor="ctr">
+            <a:normAutofit/>
+          </a:bodyPr>
+          <a:lstStyle/>
+          <a:p>
+            <a:pPr algn="ctr" indent="0" marL="0">
+              <a:buNone/>
+            </a:pPr>
+            <a:r>
+              <a:rPr lang="en-US" sz="3600" b="1" dirty="0">
+                <a:solidFill>
+                  <a:srgbClr val="990011"/>
+                </a:solidFill>
+                <a:latin typeface="Times New Roman" pitchFamily="34" charset="0"/>
+                <a:ea typeface="Times New Roman" pitchFamily="34" charset="-122"/>
+                <a:cs typeface="Times New Roman" pitchFamily="34" charset="-120"/>
+              </a:rPr>
+              <a:t>Expected Answer</a:t>
+            </a:r>
+            <a:endParaRPr lang="en-US" sz="3600" dirty="0"/>
+          </a:p>
+        </p:txBody>
+      </p:sp>
+      <p:sp>
+        <p:nvSpPr>
+          <p:cNvPr id="5" name="Text 2"/>
+          <p:cNvSpPr/>
+          <p:nvPr/>
+        </p:nvSpPr>
+        <p:spPr>
+          <a:xfrm>
+            <a:off x="5349240" y="1783080"/>
+            <a:ext cx="6522415" cy="4663440"/>
+          </a:xfrm>
+          <a:prstGeom prst="rect">
+            <a:avLst/>
+          </a:prstGeom>
+          <a:noFill/>
+          <a:ln/>
+        </p:spPr>
+        <p:txBody>
+          <a:bodyPr wrap="square" lIns="0" tIns="0" rIns="0" bIns="0" rtlCol="0" anchor="t"/>
+          <a:lstStyle/>
+          <a:p>
+            <a:pPr algn="l" indent="0" marL="0">
+              <a:spcAft>
+                <a:spcPts val="800"/>
+              </a:spcAft>
+              <a:buNone/>
+            </a:pPr>
+            <a:r>
+              <a:rPr lang="en-US" sz="4000" dirty="0">
+                <a:solidFill>
+                  <a:srgbClr val="111111"/>
+                </a:solidFill>
+                <a:latin typeface="Times New Roman" pitchFamily="34" charset="0"/>
+                <a:ea typeface="Times New Roman" pitchFamily="34" charset="-122"/>
+                <a:cs typeface="Times New Roman" pitchFamily="34" charset="-120"/>
+              </a:rPr>
+              <a:t>Reforestation and protected areas.</a:t>
+            </a:r>
+            <a:endParaRPr lang="en-US" sz="4000" dirty="0"/>
+          </a:p>
+        </p:txBody>
+      </p:sp>
+      <p:sp>
+        <p:nvSpPr>
+          <p:cNvPr id="25" name="Slide Number Placeholder 0"/>
+          <p:cNvSpPr>
+            <a:spLocks noGrp="1"/>
+          </p:cNvSpPr>
+          <p:nvPr>
+            <p:ph type="sldNum" sz="quarter" idx="4294967295"/>
+          </p:nvPr>
+        </p:nvSpPr>
+        <p:spPr>
+          <a:xfrm>
+            <a:off x="27432" y="91440"/>
+            <a:ext cx="585216" cy="475488"/>
+          </a:xfrm>
+          <a:prstGeom prst="rect">
+            <a:avLst/>
+          </a:prstGeom>
+          <a:extLst>
+            <a:ext uri="{C572A759-6A51-4108-AA02-DFA0A04FC94B}">
+              <ma14:wrappingTextBoxFlag xmlns:ma14="http://schemas.microsoft.com/office/mac/drawingml/2011/main" val="0"/>
+            </a:ext>
+          </a:extLst>
+        </p:spPr>
+        <p:txBody>
+          <a:bodyPr/>
+          <a:lstStyle>
+            <a:lvl1pPr>
+              <a:defRPr sz="2000">
+                <a:solidFill>
+                  <a:srgbClr val="FFFFFF"/>
+                </a:solidFill>
+                <a:latin typeface="Calibri"/>
+                <a:ea typeface="Calibri"/>
+                <a:cs typeface="Calibri"/>
+              </a:defRPr>
+            </a:lvl1pPr>
+          </a:lstStyle>
+          <a:p>
+            <a:pPr algn="ctr"/>
+            <a:fld id="{F7021451-1387-4CA6-816F-3879F97B5CBC}" type="slidenum">
+              <a:rPr b="1" lang="en-US"/>
+              <a:t>46</a:t>
+            </a:fld>
+            <a:endParaRPr lang="en-US"/>
+          </a:p>
+        </p:txBody>
+      </p:sp>
+    </p:spTree>
+  </p:cSld>
+  <p:clrMapOvr>
+    <a:masterClrMapping/>
+  </p:clrMapOvr>
+</p:sld>
+</file>
+
+<file path=ppt/slides/slide47.xml><?xml version="1.0" encoding="utf-8"?>
+<p:sld xmlns:a="http://schemas.openxmlformats.org/drawingml/2006/main" xmlns:r="http://schemas.openxmlformats.org/officeDocument/2006/relationships" xmlns:p="http://schemas.openxmlformats.org/presentationml/2006/main">
+  <p:cSld name="Slide 47">
+    <p:spTree>
+      <p:nvGrpSpPr>
+        <p:cNvPr id="1" name=""/>
+        <p:cNvGrpSpPr/>
+        <p:nvPr/>
+      </p:nvGrpSpPr>
+      <p:grpSpPr>
+        <a:xfrm>
+          <a:off x="0" y="0"/>
+          <a:ext cx="0" cy="0"/>
+          <a:chOff x="0" y="0"/>
+          <a:chExt cx="0" cy="0"/>
+        </a:xfrm>
+      </p:grpSpPr>
+      <p:sp>
+        <p:nvSpPr>
+          <p:cNvPr id="2" name="Text 0"/>
+          <p:cNvSpPr/>
+          <p:nvPr/>
+        </p:nvSpPr>
+        <p:spPr>
+          <a:xfrm>
+            <a:off x="457200" y="713232"/>
+            <a:ext cx="11368735" cy="274320"/>
+          </a:xfrm>
+          <a:prstGeom prst="rect">
+            <a:avLst/>
+          </a:prstGeom>
+          <a:noFill/>
+          <a:ln/>
+        </p:spPr>
+        <p:txBody>
+          <a:bodyPr wrap="square" lIns="0" tIns="0" rIns="0" bIns="0" rtlCol="0" anchor="ctr"/>
+          <a:lstStyle/>
+          <a:p>
+            <a:pPr algn="r" indent="0" marL="0">
+              <a:buNone/>
+            </a:pPr>
+            <a:r>
+              <a:rPr lang="en-US" sz="1400" b="1" dirty="0">
+                <a:solidFill>
+                  <a:srgbClr val="1C3F6E"/>
+                </a:solidFill>
+                <a:latin typeface="Calibri" pitchFamily="34" charset="0"/>
+                <a:ea typeface="Calibri" pitchFamily="34" charset="-122"/>
+                <a:cs typeface="Calibri" pitchFamily="34" charset="-120"/>
+              </a:rPr>
+              <a:t>REMEDIATION</a:t>
+            </a:r>
+            <a:endParaRPr lang="en-US" sz="1400" dirty="0"/>
+          </a:p>
+        </p:txBody>
+      </p:sp>
+      <p:pic>
+        <p:nvPicPr>
+          <p:cNvPr id="3" name="Image 0" descr="/home/claude/f4/img/minesec_sheet.png">    </p:cNvPr>
+          <p:cNvPicPr>
+            <a:picLocks noChangeAspect="1"/>
+          </p:cNvPicPr>
+          <p:nvPr/>
+        </p:nvPicPr>
+        <p:blipFill>
+          <a:blip r:embed="rId1"/>
+          <a:stretch>
+            <a:fillRect/>
+          </a:stretch>
+        </p:blipFill>
+        <p:spPr>
+          <a:xfrm>
+            <a:off x="0" y="658368"/>
+            <a:ext cx="3840480" cy="5833872"/>
+          </a:xfrm>
+          <a:prstGeom prst="rect">
+            <a:avLst/>
+          </a:prstGeom>
+        </p:spPr>
+      </p:pic>
+      <p:sp>
+        <p:nvSpPr>
+          <p:cNvPr id="4" name="Text 1"/>
+          <p:cNvSpPr/>
+          <p:nvPr/>
+        </p:nvSpPr>
+        <p:spPr>
+          <a:xfrm>
+            <a:off x="4069080" y="1005840"/>
+            <a:ext cx="7802575" cy="731520"/>
+          </a:xfrm>
+          <a:prstGeom prst="rect">
+            <a:avLst/>
+          </a:prstGeom>
+          <a:noFill/>
+          <a:ln/>
+        </p:spPr>
+        <p:txBody>
+          <a:bodyPr wrap="square" lIns="0" tIns="0" rIns="0" bIns="0" rtlCol="0" anchor="ctr">
+            <a:normAutofit/>
+          </a:bodyPr>
+          <a:lstStyle/>
+          <a:p>
+            <a:pPr algn="ctr" indent="0" marL="0">
+              <a:buNone/>
+            </a:pPr>
+            <a:r>
+              <a:rPr lang="en-US" sz="3600" b="1" dirty="0">
+                <a:solidFill>
+                  <a:srgbClr val="990011"/>
+                </a:solidFill>
+                <a:latin typeface="Times New Roman" pitchFamily="34" charset="0"/>
+                <a:ea typeface="Times New Roman" pitchFamily="34" charset="-122"/>
+                <a:cs typeface="Times New Roman" pitchFamily="34" charset="-120"/>
+              </a:rPr>
+              <a:t>Remediation</a:t>
+            </a:r>
+            <a:endParaRPr lang="en-US" sz="3600" dirty="0"/>
+          </a:p>
+        </p:txBody>
+      </p:sp>
+      <p:sp>
+        <p:nvSpPr>
+          <p:cNvPr id="5" name="Text 2"/>
+          <p:cNvSpPr/>
+          <p:nvPr/>
+        </p:nvSpPr>
+        <p:spPr>
+          <a:xfrm>
+            <a:off x="4069080" y="1783080"/>
+            <a:ext cx="7802575" cy="4663440"/>
+          </a:xfrm>
+          <a:prstGeom prst="rect">
+            <a:avLst/>
+          </a:prstGeom>
+          <a:noFill/>
+          <a:ln/>
+        </p:spPr>
+        <p:txBody>
+          <a:bodyPr wrap="square" lIns="0" tIns="0" rIns="0" bIns="0" rtlCol="0" anchor="t"/>
+          <a:lstStyle/>
+          <a:p>
+            <a:pPr algn="l" indent="0" marL="0">
+              <a:spcAft>
+                <a:spcPts val="800"/>
+              </a:spcAft>
+              <a:buNone/>
+            </a:pPr>
+            <a:r>
+              <a:rPr lang="en-US" sz="4000" b="1" dirty="0">
+                <a:solidFill>
+                  <a:srgbClr val="111111"/>
+                </a:solidFill>
+                <a:latin typeface="Times New Roman" pitchFamily="34" charset="0"/>
+                <a:ea typeface="Times New Roman" pitchFamily="34" charset="-122"/>
+                <a:cs typeface="Times New Roman" pitchFamily="34" charset="-120"/>
+              </a:rPr>
+              <a:t>Fill in the blanks:</a:t>
+            </a:r>
+            <a:endParaRPr lang="en-US" sz="4000" dirty="0"/>
+          </a:p>
+          <a:p>
+            <a:pPr algn="l" marL="342900" indent="-342900">
+              <a:spcAft>
+                <a:spcPts val="800"/>
+              </a:spcAft>
+              <a:buSzPct val="100000"/>
+              <a:buFont typeface="+mj-lt"/>
+              <a:buAutoNum type="arabicPeriod" startAt="1"/>
+            </a:pPr>
+            <a:r>
+              <a:rPr lang="en-US" sz="4000" dirty="0">
+                <a:solidFill>
+                  <a:srgbClr val="111111"/>
+                </a:solidFill>
+                <a:latin typeface="Times New Roman" pitchFamily="34" charset="0"/>
+                <a:ea typeface="Times New Roman" pitchFamily="34" charset="-122"/>
+                <a:cs typeface="Times New Roman" pitchFamily="34" charset="-120"/>
+              </a:rPr>
+              <a:t>The destruction of forests is ______.</a:t>
+            </a:r>
+            <a:endParaRPr lang="en-US" sz="4000" dirty="0"/>
+          </a:p>
+          <a:p>
+            <a:pPr algn="l" marL="342900" indent="-342900">
+              <a:spcAft>
+                <a:spcPts val="800"/>
+              </a:spcAft>
+              <a:buSzPct val="100000"/>
+              <a:buFont typeface="+mj-lt"/>
+              <a:buAutoNum type="arabicPeriod" startAt="1"/>
+            </a:pPr>
+            <a:r>
+              <a:rPr lang="en-US" sz="4000" dirty="0">
+                <a:solidFill>
+                  <a:srgbClr val="111111"/>
+                </a:solidFill>
+                <a:latin typeface="Times New Roman" pitchFamily="34" charset="0"/>
+                <a:ea typeface="Times New Roman" pitchFamily="34" charset="-122"/>
+                <a:cs typeface="Times New Roman" pitchFamily="34" charset="-120"/>
+              </a:rPr>
+              <a:t>The Dja is a forest ______.</a:t>
+            </a:r>
+            <a:endParaRPr lang="en-US" sz="4000" dirty="0"/>
+          </a:p>
+          <a:p>
+            <a:pPr algn="l" marL="342900" indent="-342900">
+              <a:spcAft>
+                <a:spcPts val="800"/>
+              </a:spcAft>
+              <a:buSzPct val="100000"/>
+              <a:buFont typeface="+mj-lt"/>
+              <a:buAutoNum type="arabicPeriod" startAt="1"/>
+            </a:pPr>
+            <a:r>
+              <a:rPr lang="en-US" sz="4000" dirty="0">
+                <a:solidFill>
+                  <a:srgbClr val="111111"/>
+                </a:solidFill>
+                <a:latin typeface="Times New Roman" pitchFamily="34" charset="0"/>
+                <a:ea typeface="Times New Roman" pitchFamily="34" charset="-122"/>
+                <a:cs typeface="Times New Roman" pitchFamily="34" charset="-120"/>
+              </a:rPr>
+              <a:t>Stoves that use less wood are ______ stoves.</a:t>
+            </a:r>
+            <a:endParaRPr lang="en-US" sz="4000" dirty="0"/>
+          </a:p>
+        </p:txBody>
+      </p:sp>
+      <p:sp>
+        <p:nvSpPr>
+          <p:cNvPr id="25" name="Slide Number Placeholder 0"/>
+          <p:cNvSpPr>
+            <a:spLocks noGrp="1"/>
+          </p:cNvSpPr>
+          <p:nvPr>
+            <p:ph type="sldNum" sz="quarter" idx="4294967295"/>
+          </p:nvPr>
+        </p:nvSpPr>
+        <p:spPr>
+          <a:xfrm>
+            <a:off x="27432" y="91440"/>
+            <a:ext cx="585216" cy="475488"/>
+          </a:xfrm>
+          <a:prstGeom prst="rect">
+            <a:avLst/>
+          </a:prstGeom>
+          <a:extLst>
+            <a:ext uri="{C572A759-6A51-4108-AA02-DFA0A04FC94B}">
+              <ma14:wrappingTextBoxFlag xmlns:ma14="http://schemas.microsoft.com/office/mac/drawingml/2011/main" val="0"/>
+            </a:ext>
+          </a:extLst>
+        </p:spPr>
+        <p:txBody>
+          <a:bodyPr/>
+          <a:lstStyle>
+            <a:lvl1pPr>
+              <a:defRPr sz="2000">
+                <a:solidFill>
+                  <a:srgbClr val="FFFFFF"/>
+                </a:solidFill>
+                <a:latin typeface="Calibri"/>
+                <a:ea typeface="Calibri"/>
+                <a:cs typeface="Calibri"/>
+              </a:defRPr>
+            </a:lvl1pPr>
+          </a:lstStyle>
+          <a:p>
+            <a:pPr algn="ctr"/>
+            <a:fld id="{F7021451-1387-4CA6-816F-3879F97B5CBC}" type="slidenum">
+              <a:rPr b="1" lang="en-US"/>
+              <a:t>47</a:t>
+            </a:fld>
+            <a:endParaRPr lang="en-US"/>
+          </a:p>
+        </p:txBody>
+      </p:sp>
+    </p:spTree>
+  </p:cSld>
+  <p:clrMapOvr>
+    <a:masterClrMapping/>
+  </p:clrMapOvr>
+</p:sld>
+</file>
+
+<file path=ppt/slides/slide48.xml><?xml version="1.0" encoding="utf-8"?>
+<p:sld xmlns:a="http://schemas.openxmlformats.org/drawingml/2006/main" xmlns:r="http://schemas.openxmlformats.org/officeDocument/2006/relationships" xmlns:p="http://schemas.openxmlformats.org/presentationml/2006/main">
+  <p:cSld name="Slide 48">
+    <p:spTree>
+      <p:nvGrpSpPr>
+        <p:cNvPr id="1" name=""/>
+        <p:cNvGrpSpPr/>
+        <p:nvPr/>
+      </p:nvGrpSpPr>
+      <p:grpSpPr>
+        <a:xfrm>
+          <a:off x="0" y="0"/>
+          <a:ext cx="0" cy="0"/>
+          <a:chOff x="0" y="0"/>
+          <a:chExt cx="0" cy="0"/>
+        </a:xfrm>
+      </p:grpSpPr>
+      <p:sp>
+        <p:nvSpPr>
+          <p:cNvPr id="2" name="Text 0"/>
+          <p:cNvSpPr/>
+          <p:nvPr/>
+        </p:nvSpPr>
+        <p:spPr>
+          <a:xfrm>
+            <a:off x="457200" y="713232"/>
+            <a:ext cx="11368735" cy="274320"/>
+          </a:xfrm>
+          <a:prstGeom prst="rect">
+            <a:avLst/>
+          </a:prstGeom>
+          <a:noFill/>
+          <a:ln/>
+        </p:spPr>
+        <p:txBody>
+          <a:bodyPr wrap="square" lIns="0" tIns="0" rIns="0" bIns="0" rtlCol="0" anchor="ctr"/>
+          <a:lstStyle/>
+          <a:p>
+            <a:pPr algn="r" indent="0" marL="0">
+              <a:buNone/>
+            </a:pPr>
+            <a:r>
+              <a:rPr lang="en-US" sz="1400" b="1" dirty="0">
+                <a:solidFill>
+                  <a:srgbClr val="1C3F6E"/>
+                </a:solidFill>
+                <a:latin typeface="Calibri" pitchFamily="34" charset="0"/>
+                <a:ea typeface="Calibri" pitchFamily="34" charset="-122"/>
+                <a:cs typeface="Calibri" pitchFamily="34" charset="-120"/>
+              </a:rPr>
+              <a:t>HOMEWORK</a:t>
+            </a:r>
+            <a:endParaRPr lang="en-US" sz="1400" dirty="0"/>
+          </a:p>
+        </p:txBody>
+      </p:sp>
+      <p:pic>
+        <p:nvPicPr>
+          <p:cNvPr id="3" name="Image 0" descr="/home/claude/f4/img/minesec_sheet.png">    </p:cNvPr>
+          <p:cNvPicPr>
+            <a:picLocks noChangeAspect="1"/>
+          </p:cNvPicPr>
+          <p:nvPr/>
+        </p:nvPicPr>
+        <p:blipFill>
+          <a:blip r:embed="rId1"/>
+          <a:stretch>
+            <a:fillRect/>
+          </a:stretch>
+        </p:blipFill>
+        <p:spPr>
+          <a:xfrm>
+            <a:off x="0" y="658368"/>
+            <a:ext cx="5120640" cy="5833872"/>
+          </a:xfrm>
+          <a:prstGeom prst="rect">
+            <a:avLst/>
+          </a:prstGeom>
+        </p:spPr>
+      </p:pic>
+      <p:sp>
+        <p:nvSpPr>
+          <p:cNvPr id="4" name="Text 1"/>
+          <p:cNvSpPr/>
+          <p:nvPr/>
+        </p:nvSpPr>
+        <p:spPr>
+          <a:xfrm>
+            <a:off x="5349240" y="1005840"/>
+            <a:ext cx="6522415" cy="731520"/>
+          </a:xfrm>
+          <a:prstGeom prst="rect">
+            <a:avLst/>
+          </a:prstGeom>
+          <a:noFill/>
+          <a:ln/>
+        </p:spPr>
+        <p:txBody>
+          <a:bodyPr wrap="square" lIns="0" tIns="0" rIns="0" bIns="0" rtlCol="0" anchor="ctr">
+            <a:normAutofit/>
+          </a:bodyPr>
+          <a:lstStyle/>
+          <a:p>
+            <a:pPr algn="ctr" indent="0" marL="0">
+              <a:buNone/>
+            </a:pPr>
+            <a:r>
+              <a:rPr lang="en-US" sz="3600" b="1" dirty="0">
+                <a:solidFill>
+                  <a:srgbClr val="990011"/>
+                </a:solidFill>
+                <a:latin typeface="Times New Roman" pitchFamily="34" charset="0"/>
+                <a:ea typeface="Times New Roman" pitchFamily="34" charset="-122"/>
+                <a:cs typeface="Times New Roman" pitchFamily="34" charset="-120"/>
+              </a:rPr>
+              <a:t>Homework</a:t>
+            </a:r>
+            <a:endParaRPr lang="en-US" sz="3600" dirty="0"/>
+          </a:p>
+        </p:txBody>
+      </p:sp>
+      <p:sp>
+        <p:nvSpPr>
+          <p:cNvPr id="5" name="Text 2"/>
+          <p:cNvSpPr/>
+          <p:nvPr/>
+        </p:nvSpPr>
+        <p:spPr>
+          <a:xfrm>
+            <a:off x="5349240" y="1783080"/>
+            <a:ext cx="6522415" cy="4663440"/>
+          </a:xfrm>
+          <a:prstGeom prst="rect">
+            <a:avLst/>
+          </a:prstGeom>
+          <a:noFill/>
+          <a:ln/>
+        </p:spPr>
+        <p:txBody>
+          <a:bodyPr wrap="square" lIns="0" tIns="0" rIns="0" bIns="0" rtlCol="0" anchor="t"/>
+          <a:lstStyle/>
+          <a:p>
+            <a:pPr algn="l" indent="0" marL="0">
+              <a:spcAft>
+                <a:spcPts val="800"/>
+              </a:spcAft>
+              <a:buNone/>
+            </a:pPr>
+            <a:r>
+              <a:rPr lang="en-US" sz="4000" dirty="0">
+                <a:solidFill>
+                  <a:srgbClr val="111111"/>
+                </a:solidFill>
+                <a:latin typeface="Times New Roman" pitchFamily="34" charset="0"/>
+                <a:ea typeface="Times New Roman" pitchFamily="34" charset="-122"/>
+                <a:cs typeface="Times New Roman" pitchFamily="34" charset="-120"/>
+              </a:rPr>
+              <a:t>Write three things your school can do against deforestation.</a:t>
+            </a:r>
+            <a:endParaRPr lang="en-US" sz="4000" dirty="0"/>
+          </a:p>
+        </p:txBody>
+      </p:sp>
+      <p:sp>
+        <p:nvSpPr>
+          <p:cNvPr id="25" name="Slide Number Placeholder 0"/>
+          <p:cNvSpPr>
+            <a:spLocks noGrp="1"/>
+          </p:cNvSpPr>
+          <p:nvPr>
+            <p:ph type="sldNum" sz="quarter" idx="4294967295"/>
+          </p:nvPr>
+        </p:nvSpPr>
+        <p:spPr>
+          <a:xfrm>
+            <a:off x="27432" y="91440"/>
+            <a:ext cx="585216" cy="475488"/>
+          </a:xfrm>
+          <a:prstGeom prst="rect">
+            <a:avLst/>
+          </a:prstGeom>
+          <a:extLst>
+            <a:ext uri="{C572A759-6A51-4108-AA02-DFA0A04FC94B}">
+              <ma14:wrappingTextBoxFlag xmlns:ma14="http://schemas.microsoft.com/office/mac/drawingml/2011/main" val="0"/>
+            </a:ext>
+          </a:extLst>
+        </p:spPr>
+        <p:txBody>
+          <a:bodyPr/>
+          <a:lstStyle>
+            <a:lvl1pPr>
+              <a:defRPr sz="2000">
+                <a:solidFill>
+                  <a:srgbClr val="FFFFFF"/>
+                </a:solidFill>
+                <a:latin typeface="Calibri"/>
+                <a:ea typeface="Calibri"/>
+                <a:cs typeface="Calibri"/>
+              </a:defRPr>
+            </a:lvl1pPr>
+          </a:lstStyle>
+          <a:p>
+            <a:pPr algn="ctr"/>
+            <a:fld id="{F7021451-1387-4CA6-816F-3879F97B5CBC}" type="slidenum">
+              <a:rPr b="1" lang="en-US"/>
+              <a:t>48</a:t>
+            </a:fld>
+            <a:endParaRPr lang="en-US"/>
+          </a:p>
+        </p:txBody>
+      </p:sp>
+    </p:spTree>
+  </p:cSld>
+  <p:clrMapOvr>
+    <a:masterClrMapping/>
+  </p:clrMapOvr>
+</p:sld>
+</file>
+
+<file path=ppt/slides/slide49.xml><?xml version="1.0" encoding="utf-8"?>
+<p:sld xmlns:a="http://schemas.openxmlformats.org/drawingml/2006/main" xmlns:r="http://schemas.openxmlformats.org/officeDocument/2006/relationships" xmlns:p="http://schemas.openxmlformats.org/presentationml/2006/main">
+  <p:cSld name="Slide 49">
+    <p:spTree>
+      <p:nvGrpSpPr>
+        <p:cNvPr id="1" name=""/>
+        <p:cNvGrpSpPr/>
+        <p:nvPr/>
+      </p:nvGrpSpPr>
+      <p:grpSpPr>
+        <a:xfrm>
+          <a:off x="0" y="0"/>
+          <a:ext cx="0" cy="0"/>
+          <a:chOff x="0" y="0"/>
+          <a:chExt cx="0" cy="0"/>
+        </a:xfrm>
+      </p:grpSpPr>
+      <p:sp>
+        <p:nvSpPr>
+          <p:cNvPr id="2" name="Text 0"/>
+          <p:cNvSpPr/>
+          <p:nvPr/>
+        </p:nvSpPr>
+        <p:spPr>
+          <a:xfrm>
+            <a:off x="457200" y="713232"/>
+            <a:ext cx="11368735" cy="274320"/>
+          </a:xfrm>
+          <a:prstGeom prst="rect">
+            <a:avLst/>
+          </a:prstGeom>
+          <a:noFill/>
+          <a:ln/>
+        </p:spPr>
+        <p:txBody>
+          <a:bodyPr wrap="square" lIns="0" tIns="0" rIns="0" bIns="0" rtlCol="0" anchor="ctr"/>
+          <a:lstStyle/>
+          <a:p>
+            <a:pPr algn="r" indent="0" marL="0">
+              <a:buNone/>
+            </a:pPr>
+            <a:r>
+              <a:rPr lang="en-US" sz="1400" b="1" dirty="0">
+                <a:solidFill>
+                  <a:srgbClr val="1C3F6E"/>
+                </a:solidFill>
+                <a:latin typeface="Calibri" pitchFamily="34" charset="0"/>
+                <a:ea typeface="Calibri" pitchFamily="34" charset="-122"/>
+                <a:cs typeface="Calibri" pitchFamily="34" charset="-120"/>
+              </a:rPr>
+              <a:t>NEXT LESSON</a:t>
+            </a:r>
+            <a:endParaRPr lang="en-US" sz="1400" dirty="0"/>
+          </a:p>
+        </p:txBody>
+      </p:sp>
+      <p:pic>
+        <p:nvPicPr>
+          <p:cNvPr id="3" name="Image 0" descr="/home/claude/f4/img/minesec_sheet.png">    </p:cNvPr>
+          <p:cNvPicPr>
+            <a:picLocks noChangeAspect="1"/>
+          </p:cNvPicPr>
+          <p:nvPr/>
+        </p:nvPicPr>
+        <p:blipFill>
+          <a:blip r:embed="rId1"/>
+          <a:stretch>
+            <a:fillRect/>
+          </a:stretch>
+        </p:blipFill>
+        <p:spPr>
+          <a:xfrm>
+            <a:off x="0" y="658368"/>
+            <a:ext cx="5120640" cy="5833872"/>
+          </a:xfrm>
+          <a:prstGeom prst="rect">
+            <a:avLst/>
+          </a:prstGeom>
+        </p:spPr>
+      </p:pic>
+      <p:sp>
+        <p:nvSpPr>
+          <p:cNvPr id="4" name="Text 1"/>
+          <p:cNvSpPr/>
+          <p:nvPr/>
+        </p:nvSpPr>
+        <p:spPr>
+          <a:xfrm>
+            <a:off x="5349240" y="1005840"/>
+            <a:ext cx="6522415" cy="731520"/>
+          </a:xfrm>
+          <a:prstGeom prst="rect">
+            <a:avLst/>
+          </a:prstGeom>
+          <a:noFill/>
+          <a:ln/>
+        </p:spPr>
+        <p:txBody>
+          <a:bodyPr wrap="square" lIns="0" tIns="0" rIns="0" bIns="0" rtlCol="0" anchor="ctr">
+            <a:normAutofit/>
+          </a:bodyPr>
+          <a:lstStyle/>
+          <a:p>
+            <a:pPr algn="ctr" indent="0" marL="0">
+              <a:buNone/>
+            </a:pPr>
+            <a:r>
+              <a:rPr lang="en-US" sz="3600" b="1" dirty="0">
+                <a:solidFill>
+                  <a:srgbClr val="990011"/>
+                </a:solidFill>
+                <a:latin typeface="Times New Roman" pitchFamily="34" charset="0"/>
+                <a:ea typeface="Times New Roman" pitchFamily="34" charset="-122"/>
+                <a:cs typeface="Times New Roman" pitchFamily="34" charset="-120"/>
+              </a:rPr>
+              <a:t>Next Lesson</a:t>
+            </a:r>
+            <a:endParaRPr lang="en-US" sz="3600" dirty="0"/>
+          </a:p>
+        </p:txBody>
+      </p:sp>
+      <p:sp>
+        <p:nvSpPr>
+          <p:cNvPr id="5" name="Text 2"/>
+          <p:cNvSpPr/>
+          <p:nvPr/>
+        </p:nvSpPr>
+        <p:spPr>
+          <a:xfrm>
+            <a:off x="5349240" y="1783080"/>
+            <a:ext cx="6522415" cy="4663440"/>
+          </a:xfrm>
+          <a:prstGeom prst="rect">
+            <a:avLst/>
+          </a:prstGeom>
+          <a:noFill/>
+          <a:ln/>
+        </p:spPr>
+        <p:txBody>
+          <a:bodyPr wrap="square" lIns="0" tIns="0" rIns="0" bIns="0" rtlCol="0" anchor="ctr"/>
+          <a:lstStyle/>
+          <a:p>
+            <a:pPr algn="ctr" indent="0" marL="0">
+              <a:spcAft>
+                <a:spcPts val="800"/>
+              </a:spcAft>
+              <a:buNone/>
+            </a:pPr>
+            <a:r>
+              <a:rPr lang="en-US" sz="4000" b="1" dirty="0">
+                <a:solidFill>
+                  <a:srgbClr val="111111"/>
+                </a:solidFill>
+                <a:latin typeface="Times New Roman" pitchFamily="34" charset="0"/>
+                <a:ea typeface="Times New Roman" pitchFamily="34" charset="-122"/>
+                <a:cs typeface="Times New Roman" pitchFamily="34" charset="-120"/>
+              </a:rPr>
+              <a:t>Our next lesson will be on:</a:t>
+            </a:r>
+            <a:endParaRPr lang="en-US" sz="4000" dirty="0"/>
+          </a:p>
+          <a:p>
+            <a:pPr algn="ctr" indent="0" marL="0">
+              <a:spcAft>
+                <a:spcPts val="800"/>
+              </a:spcAft>
+              <a:buNone/>
+            </a:pPr>
+            <a:r>
+              <a:rPr lang="en-US" sz="4000" b="1" dirty="0">
+                <a:solidFill>
+                  <a:srgbClr val="990011"/>
+                </a:solidFill>
+                <a:latin typeface="Times New Roman" pitchFamily="34" charset="0"/>
+                <a:ea typeface="Times New Roman" pitchFamily="34" charset="-122"/>
+                <a:cs typeface="Times New Roman" pitchFamily="34" charset="-120"/>
+              </a:rPr>
+              <a:t>Practical Work 10: Description of Vegetation on Maps</a:t>
+            </a:r>
+            <a:endParaRPr lang="en-US" sz="4000" dirty="0"/>
+          </a:p>
+        </p:txBody>
+      </p:sp>
+      <p:sp>
+        <p:nvSpPr>
+          <p:cNvPr id="25" name="Slide Number Placeholder 0"/>
+          <p:cNvSpPr>
+            <a:spLocks noGrp="1"/>
+          </p:cNvSpPr>
+          <p:nvPr>
+            <p:ph type="sldNum" sz="quarter" idx="4294967295"/>
+          </p:nvPr>
+        </p:nvSpPr>
+        <p:spPr>
+          <a:xfrm>
+            <a:off x="27432" y="91440"/>
+            <a:ext cx="585216" cy="475488"/>
+          </a:xfrm>
+          <a:prstGeom prst="rect">
+            <a:avLst/>
+          </a:prstGeom>
+          <a:extLst>
+            <a:ext uri="{C572A759-6A51-4108-AA02-DFA0A04FC94B}">
+              <ma14:wrappingTextBoxFlag xmlns:ma14="http://schemas.microsoft.com/office/mac/drawingml/2011/main" val="0"/>
+            </a:ext>
+          </a:extLst>
+        </p:spPr>
+        <p:txBody>
+          <a:bodyPr/>
+          <a:lstStyle>
+            <a:lvl1pPr>
+              <a:defRPr sz="2000">
+                <a:solidFill>
+                  <a:srgbClr val="FFFFFF"/>
+                </a:solidFill>
+                <a:latin typeface="Calibri"/>
+                <a:ea typeface="Calibri"/>
+                <a:cs typeface="Calibri"/>
+              </a:defRPr>
+            </a:lvl1pPr>
+          </a:lstStyle>
+          <a:p>
+            <a:pPr algn="ctr"/>
+            <a:fld id="{F7021451-1387-4CA6-816F-3879F97B5CBC}" type="slidenum">
+              <a:rPr b="1" lang="en-US"/>
+              <a:t>49</a:t>
+            </a:fld>
+            <a:endParaRPr lang="en-US"/>
+          </a:p>
+        </p:txBody>
+      </p:sp>
+    </p:spTree>
+  </p:cSld>
+  <p:clrMapOvr>
+    <a:masterClrMapping/>
+  </p:clrMapOvr>
+</p:sld>
+</file>
+
+<file path=ppt/slides/slide5.xml><?xml version="1.0" encoding="utf-8"?>
+<p:sld xmlns:a="http://schemas.openxmlformats.org/drawingml/2006/main" xmlns:r="http://schemas.openxmlformats.org/officeDocument/2006/relationships" xmlns:p="http://schemas.openxmlformats.org/presentationml/2006/main">
+  <p:cSld name="Slide 5">
+    <p:spTree>
+      <p:nvGrpSpPr>
+        <p:cNvPr id="1" name=""/>
+        <p:cNvGrpSpPr/>
+        <p:nvPr/>
+      </p:nvGrpSpPr>
+      <p:grpSpPr>
+        <a:xfrm>
+          <a:off x="0" y="0"/>
+          <a:ext cx="0" cy="0"/>
+          <a:chOff x="0" y="0"/>
+          <a:chExt cx="0" cy="0"/>
+        </a:xfrm>
+      </p:grpSpPr>
+      <p:sp>
+        <p:nvSpPr>
+          <p:cNvPr id="2" name="Text 0"/>
+          <p:cNvSpPr/>
+          <p:nvPr/>
+        </p:nvSpPr>
+        <p:spPr>
+          <a:xfrm>
+            <a:off x="457200" y="713232"/>
+            <a:ext cx="11368735" cy="274320"/>
+          </a:xfrm>
+          <a:prstGeom prst="rect">
+            <a:avLst/>
+          </a:prstGeom>
+          <a:noFill/>
+          <a:ln/>
+        </p:spPr>
+        <p:txBody>
+          <a:bodyPr wrap="square" lIns="0" tIns="0" rIns="0" bIns="0" rtlCol="0" anchor="ctr"/>
+          <a:lstStyle/>
+          <a:p>
+            <a:pPr algn="r" indent="0" marL="0">
+              <a:buNone/>
+            </a:pPr>
+            <a:r>
+              <a:rPr lang="en-US" sz="1400" b="1" dirty="0">
+                <a:solidFill>
+                  <a:srgbClr val="1C3F6E"/>
+                </a:solidFill>
+                <a:latin typeface="Calibri" pitchFamily="34" charset="0"/>
+                <a:ea typeface="Calibri" pitchFamily="34" charset="-122"/>
+                <a:cs typeface="Calibri" pitchFamily="34" charset="-120"/>
+              </a:rPr>
+              <a:t>HOMEWORK CORRECTION</a:t>
+            </a:r>
+            <a:endParaRPr lang="en-US" sz="1400" dirty="0"/>
+          </a:p>
+        </p:txBody>
+      </p:sp>
+      <p:pic>
+        <p:nvPicPr>
+          <p:cNvPr id="3" name="Image 0" descr="/home/claude/f4/img/minesec_sheet.png">    </p:cNvPr>
+          <p:cNvPicPr>
+            <a:picLocks noChangeAspect="1"/>
+          </p:cNvPicPr>
+          <p:nvPr/>
+        </p:nvPicPr>
+        <p:blipFill>
+          <a:blip r:embed="rId1"/>
+          <a:stretch>
+            <a:fillRect/>
+          </a:stretch>
+        </p:blipFill>
+        <p:spPr>
+          <a:xfrm>
+            <a:off x="0" y="658368"/>
+            <a:ext cx="5120640" cy="5833872"/>
+          </a:xfrm>
+          <a:prstGeom prst="rect">
+            <a:avLst/>
+          </a:prstGeom>
+        </p:spPr>
+      </p:pic>
+      <p:sp>
+        <p:nvSpPr>
+          <p:cNvPr id="4" name="Text 1"/>
+          <p:cNvSpPr/>
+          <p:nvPr/>
+        </p:nvSpPr>
+        <p:spPr>
+          <a:xfrm>
+            <a:off x="5349240" y="1005840"/>
+            <a:ext cx="6522415" cy="731520"/>
+          </a:xfrm>
+          <a:prstGeom prst="rect">
+            <a:avLst/>
+          </a:prstGeom>
+          <a:noFill/>
+          <a:ln/>
+        </p:spPr>
+        <p:txBody>
+          <a:bodyPr wrap="square" lIns="0" tIns="0" rIns="0" bIns="0" rtlCol="0" anchor="ctr">
+            <a:normAutofit/>
+          </a:bodyPr>
+          <a:lstStyle/>
+          <a:p>
+            <a:pPr algn="ctr" indent="0" marL="0">
+              <a:buNone/>
+            </a:pPr>
+            <a:r>
+              <a:rPr lang="en-US" sz="3600" b="1" dirty="0">
+                <a:solidFill>
+                  <a:srgbClr val="990011"/>
+                </a:solidFill>
+                <a:latin typeface="Times New Roman" pitchFamily="34" charset="0"/>
+                <a:ea typeface="Times New Roman" pitchFamily="34" charset="-122"/>
+                <a:cs typeface="Times New Roman" pitchFamily="34" charset="-120"/>
+              </a:rPr>
+              <a:t>Correction: Possible Answer</a:t>
+            </a:r>
+            <a:endParaRPr lang="en-US" sz="3600" dirty="0"/>
+          </a:p>
+        </p:txBody>
+      </p:sp>
+      <p:sp>
+        <p:nvSpPr>
+          <p:cNvPr id="5" name="Text 2"/>
+          <p:cNvSpPr/>
+          <p:nvPr/>
+        </p:nvSpPr>
+        <p:spPr>
+          <a:xfrm>
+            <a:off x="5349240" y="1783080"/>
+            <a:ext cx="6522415" cy="4663440"/>
+          </a:xfrm>
+          <a:prstGeom prst="rect">
+            <a:avLst/>
+          </a:prstGeom>
+          <a:noFill/>
+          <a:ln/>
+        </p:spPr>
+        <p:txBody>
+          <a:bodyPr wrap="square" lIns="0" tIns="0" rIns="0" bIns="0" rtlCol="0" anchor="t"/>
+          <a:lstStyle/>
+          <a:p>
+            <a:pPr algn="l" indent="0" marL="0">
+              <a:spcAft>
+                <a:spcPts val="800"/>
+              </a:spcAft>
+              <a:buNone/>
+            </a:pPr>
+            <a:r>
+              <a:rPr lang="en-US" sz="4000" dirty="0">
+                <a:solidFill>
+                  <a:srgbClr val="111111"/>
+                </a:solidFill>
+                <a:latin typeface="Times New Roman" pitchFamily="34" charset="0"/>
+                <a:ea typeface="Times New Roman" pitchFamily="34" charset="-122"/>
+                <a:cs typeface="Times New Roman" pitchFamily="34" charset="-120"/>
+              </a:rPr>
+              <a:t>Sapele (furniture), iroko (building), ebony (carving) (also ayous for plywood).</a:t>
+            </a:r>
+            <a:endParaRPr lang="en-US" sz="4000" dirty="0"/>
+          </a:p>
+        </p:txBody>
+      </p:sp>
+      <p:sp>
+        <p:nvSpPr>
+          <p:cNvPr id="25" name="Slide Number Placeholder 0"/>
+          <p:cNvSpPr>
+            <a:spLocks noGrp="1"/>
+          </p:cNvSpPr>
+          <p:nvPr>
+            <p:ph type="sldNum" sz="quarter" idx="4294967295"/>
+          </p:nvPr>
+        </p:nvSpPr>
+        <p:spPr>
+          <a:xfrm>
+            <a:off x="27432" y="91440"/>
+            <a:ext cx="585216" cy="475488"/>
+          </a:xfrm>
+          <a:prstGeom prst="rect">
+            <a:avLst/>
+          </a:prstGeom>
+          <a:extLst>
+            <a:ext uri="{C572A759-6A51-4108-AA02-DFA0A04FC94B}">
+              <ma14:wrappingTextBoxFlag xmlns:ma14="http://schemas.microsoft.com/office/mac/drawingml/2011/main" val="0"/>
+            </a:ext>
+          </a:extLst>
+        </p:spPr>
+        <p:txBody>
+          <a:bodyPr/>
+          <a:lstStyle>
+            <a:lvl1pPr>
+              <a:defRPr sz="2000">
+                <a:solidFill>
+                  <a:srgbClr val="FFFFFF"/>
+                </a:solidFill>
+                <a:latin typeface="Calibri"/>
+                <a:ea typeface="Calibri"/>
+                <a:cs typeface="Calibri"/>
+              </a:defRPr>
+            </a:lvl1pPr>
+          </a:lstStyle>
+          <a:p>
+            <a:pPr algn="ctr"/>
+            <a:fld id="{F7021451-1387-4CA6-816F-3879F97B5CBC}" type="slidenum">
+              <a:rPr b="1" lang="en-US"/>
+              <a:t>5</a:t>
+            </a:fld>
+            <a:endParaRPr lang="en-US"/>
+          </a:p>
+        </p:txBody>
+      </p:sp>
+    </p:spTree>
+  </p:cSld>
+  <p:clrMapOvr>
+    <a:masterClrMapping/>
+  </p:clrMapOvr>
+</p:sld>
+</file>
+
+<file path=ppt/slides/slide50.xml><?xml version="1.0" encoding="utf-8"?>
+<p:sld xmlns:a="http://schemas.openxmlformats.org/drawingml/2006/main" xmlns:r="http://schemas.openxmlformats.org/officeDocument/2006/relationships" xmlns:p="http://schemas.openxmlformats.org/presentationml/2006/main">
+  <p:cSld name="Slide 50">
+    <p:spTree>
+      <p:nvGrpSpPr>
+        <p:cNvPr id="1" name=""/>
+        <p:cNvGrpSpPr/>
+        <p:nvPr/>
+      </p:nvGrpSpPr>
+      <p:grpSpPr>
+        <a:xfrm>
+          <a:off x="0" y="0"/>
+          <a:ext cx="0" cy="0"/>
+          <a:chOff x="0" y="0"/>
+          <a:chExt cx="0" cy="0"/>
+        </a:xfrm>
+      </p:grpSpPr>
+      <p:sp>
+        <p:nvSpPr>
+          <p:cNvPr id="2" name="Text 0"/>
+          <p:cNvSpPr/>
+          <p:nvPr/>
+        </p:nvSpPr>
+        <p:spPr>
+          <a:xfrm>
+            <a:off x="457200" y="713232"/>
+            <a:ext cx="11368735" cy="274320"/>
+          </a:xfrm>
+          <a:prstGeom prst="rect">
+            <a:avLst/>
+          </a:prstGeom>
+          <a:noFill/>
+          <a:ln/>
+        </p:spPr>
+        <p:txBody>
+          <a:bodyPr wrap="square" lIns="0" tIns="0" rIns="0" bIns="0" rtlCol="0" anchor="ctr"/>
+          <a:lstStyle/>
+          <a:p>
+            <a:pPr algn="r" indent="0" marL="0">
+              <a:buNone/>
+            </a:pPr>
+            <a:r>
+              <a:rPr lang="en-US" sz="1400" b="1" dirty="0">
+                <a:solidFill>
+                  <a:srgbClr val="1C3F6E"/>
+                </a:solidFill>
+                <a:latin typeface="Calibri" pitchFamily="34" charset="0"/>
+                <a:ea typeface="Calibri" pitchFamily="34" charset="-122"/>
+                <a:cs typeface="Calibri" pitchFamily="34" charset="-120"/>
+              </a:rPr>
               <a:t>BILINGUAL GAME</a:t>
             </a:r>
             <a:endParaRPr lang="en-US" sz="1400" dirty="0"/>
@@ -15910,7 +18328,7 @@
       </p:sp>
       <p:graphicFrame>
         <p:nvGraphicFramePr>
-          <p:cNvPr id="46" name="Table 0"/>
+          <p:cNvPr id="51" name="Table 0"/>
           <p:cNvGraphicFramePr>
             <a:graphicFrameLocks noGrp="1"/>
           </p:cNvGraphicFramePr>
@@ -16946,7 +19364,7 @@
             <a:pPr algn="ctr"/>
             <a:fld id="{F7021451-1387-4CA6-816F-3879F97B5CBC}" type="slidenum">
               <a:rPr b="1" lang="en-US"/>
-              <a:t>45</a:t>
+              <a:t>50</a:t>
             </a:fld>
             <a:endParaRPr lang="en-US"/>
           </a:p>
@@ -16960,9 +19378,9 @@
 </p:sld>
 </file>
 
-<file path=ppt/slides/slide46.xml><?xml version="1.0" encoding="utf-8"?>
+<file path=ppt/slides/slide51.xml><?xml version="1.0" encoding="utf-8"?>
 <p:sld xmlns:a="http://schemas.openxmlformats.org/drawingml/2006/main" xmlns:r="http://schemas.openxmlformats.org/officeDocument/2006/relationships" xmlns:p="http://schemas.openxmlformats.org/presentationml/2006/main">
-  <p:cSld name="Slide 46">
+  <p:cSld name="Slide 51">
     <p:spTree>
       <p:nvGrpSpPr>
         <p:cNvPr id="1" name=""/>
@@ -17057,7 +19475,7 @@
       </p:sp>
       <p:graphicFrame>
         <p:nvGraphicFramePr>
-          <p:cNvPr id="47" name="Table 0"/>
+          <p:cNvPr id="52" name="Table 0"/>
           <p:cNvGraphicFramePr>
             <a:graphicFrameLocks noGrp="1"/>
           </p:cNvGraphicFramePr>
@@ -17679,7 +20097,7 @@
             <a:pPr algn="ctr"/>
             <a:fld id="{F7021451-1387-4CA6-816F-3879F97B5CBC}" type="slidenum">
               <a:rPr b="1" lang="en-US"/>
-              <a:t>46</a:t>
+              <a:t>51</a:t>
             </a:fld>
             <a:endParaRPr lang="en-US"/>
           </a:p>
@@ -17693,9 +20111,9 @@
 </p:sld>
 </file>
 
-<file path=ppt/slides/slide47.xml><?xml version="1.0" encoding="utf-8"?>
+<file path=ppt/slides/slide52.xml><?xml version="1.0" encoding="utf-8"?>
 <p:sld xmlns:a="http://schemas.openxmlformats.org/drawingml/2006/main" xmlns:r="http://schemas.openxmlformats.org/officeDocument/2006/relationships" xmlns:p="http://schemas.openxmlformats.org/presentationml/2006/main">
-  <p:cSld name="Slide 47">
+  <p:cSld name="Slide 52">
     <p:spTree>
       <p:nvGrpSpPr>
         <p:cNvPr id="1" name=""/>
@@ -17790,7 +20208,7 @@
       </p:sp>
       <p:graphicFrame>
         <p:nvGraphicFramePr>
-          <p:cNvPr id="48" name="Table 0"/>
+          <p:cNvPr id="53" name="Table 0"/>
           <p:cNvGraphicFramePr>
             <a:graphicFrameLocks noGrp="1"/>
           </p:cNvGraphicFramePr>
@@ -17900,7 +20318,7 @@
                           <a:ea typeface="Calibri" pitchFamily="34" charset="-122"/>
                           <a:cs typeface="Calibri" pitchFamily="34" charset="-120"/>
                         </a:rPr>
-                        <a:t>Causes and Manifestations; Consequences and Solutions.</a:t>
+                        <a:t>Causes; Manifestations; Consequences; Solutions.</a:t>
                       </a:r>
                       <a:endParaRPr lang="en-US" sz="1600" dirty="0">
                         <a:latin typeface="Calibri" charset="0"/>
@@ -18550,7 +20968,7 @@
             <a:pPr algn="ctr"/>
             <a:fld id="{F7021451-1387-4CA6-816F-3879F97B5CBC}" type="slidenum">
               <a:rPr b="1" lang="en-US"/>
-              <a:t>47</a:t>
+              <a:t>52</a:t>
             </a:fld>
             <a:endParaRPr lang="en-US"/>
           </a:p>
@@ -18564,9 +20982,9 @@
 </p:sld>
 </file>
 
-<file path=ppt/slides/slide48.xml><?xml version="1.0" encoding="utf-8"?>
+<file path=ppt/slides/slide53.xml><?xml version="1.0" encoding="utf-8"?>
 <p:sld xmlns:a="http://schemas.openxmlformats.org/drawingml/2006/main" xmlns:r="http://schemas.openxmlformats.org/officeDocument/2006/relationships" xmlns:p="http://schemas.openxmlformats.org/presentationml/2006/main">
-  <p:cSld name="Slide 48">
+  <p:cSld name="Slide 53">
     <p:spTree>
       <p:nvGrpSpPr>
         <p:cNvPr id="1" name=""/>
@@ -18875,7 +21293,7 @@
             <a:pPr algn="ctr"/>
             <a:fld id="{F7021451-1387-4CA6-816F-3879F97B5CBC}" type="slidenum">
               <a:rPr b="1" lang="en-US"/>
-              <a:t>48</a:t>
+              <a:t>53</a:t>
             </a:fld>
             <a:endParaRPr lang="en-US"/>
           </a:p>
@@ -18889,9 +21307,9 @@
 </p:sld>
 </file>
 
-<file path=ppt/slides/slide49.xml><?xml version="1.0" encoding="utf-8"?>
+<file path=ppt/slides/slide54.xml><?xml version="1.0" encoding="utf-8"?>
 <p:sld xmlns:a="http://schemas.openxmlformats.org/drawingml/2006/main" xmlns:r="http://schemas.openxmlformats.org/officeDocument/2006/relationships" xmlns:p="http://schemas.openxmlformats.org/presentationml/2006/main">
-  <p:cSld name="Slide 49">
+  <p:cSld name="Slide 54">
     <p:spTree>
       <p:nvGrpSpPr>
         <p:cNvPr id="1" name=""/>
@@ -19200,226 +21618,7 @@
             <a:pPr algn="ctr"/>
             <a:fld id="{F7021451-1387-4CA6-816F-3879F97B5CBC}" type="slidenum">
               <a:rPr b="1" lang="en-US"/>
-              <a:t>49</a:t>
-            </a:fld>
-            <a:endParaRPr lang="en-US"/>
-          </a:p>
-        </p:txBody>
-      </p:sp>
-    </p:spTree>
-  </p:cSld>
-  <p:clrMapOvr>
-    <a:masterClrMapping/>
-  </p:clrMapOvr>
-</p:sld>
-</file>
-
-<file path=ppt/slides/slide5.xml><?xml version="1.0" encoding="utf-8"?>
-<p:sld xmlns:a="http://schemas.openxmlformats.org/drawingml/2006/main" xmlns:r="http://schemas.openxmlformats.org/officeDocument/2006/relationships" xmlns:p="http://schemas.openxmlformats.org/presentationml/2006/main">
-  <p:cSld name="Slide 5">
-    <p:spTree>
-      <p:nvGrpSpPr>
-        <p:cNvPr id="1" name=""/>
-        <p:cNvGrpSpPr/>
-        <p:nvPr/>
-      </p:nvGrpSpPr>
-      <p:grpSpPr>
-        <a:xfrm>
-          <a:off x="0" y="0"/>
-          <a:ext cx="0" cy="0"/>
-          <a:chOff x="0" y="0"/>
-          <a:chExt cx="0" cy="0"/>
-        </a:xfrm>
-      </p:grpSpPr>
-      <p:sp>
-        <p:nvSpPr>
-          <p:cNvPr id="2" name="Text 0"/>
-          <p:cNvSpPr/>
-          <p:nvPr/>
-        </p:nvSpPr>
-        <p:spPr>
-          <a:xfrm>
-            <a:off x="457200" y="713232"/>
-            <a:ext cx="11368735" cy="274320"/>
-          </a:xfrm>
-          <a:prstGeom prst="rect">
-            <a:avLst/>
-          </a:prstGeom>
-          <a:noFill/>
-          <a:ln/>
-        </p:spPr>
-        <p:txBody>
-          <a:bodyPr wrap="square" lIns="0" tIns="0" rIns="0" bIns="0" rtlCol="0" anchor="ctr"/>
-          <a:lstStyle/>
-          <a:p>
-            <a:pPr algn="r" indent="0" marL="0">
-              <a:buNone/>
-            </a:pPr>
-            <a:r>
-              <a:rPr lang="en-US" sz="1400" b="1" dirty="0">
-                <a:solidFill>
-                  <a:srgbClr val="1C3F6E"/>
-                </a:solidFill>
-                <a:latin typeface="Calibri" pitchFamily="34" charset="0"/>
-                <a:ea typeface="Calibri" pitchFamily="34" charset="-122"/>
-                <a:cs typeface="Calibri" pitchFamily="34" charset="-120"/>
-              </a:rPr>
-              <a:t>HOMEWORK CORRECTION</a:t>
-            </a:r>
-            <a:endParaRPr lang="en-US" sz="1400" dirty="0"/>
-          </a:p>
-        </p:txBody>
-      </p:sp>
-      <p:pic>
-        <p:nvPicPr>
-          <p:cNvPr id="3" name="Image 0" descr="/home/claude/f4/img/minesec_sheet.png">    </p:cNvPr>
-          <p:cNvPicPr>
-            <a:picLocks noChangeAspect="1"/>
-          </p:cNvPicPr>
-          <p:nvPr/>
-        </p:nvPicPr>
-        <p:blipFill>
-          <a:blip r:embed="rId1"/>
-          <a:stretch>
-            <a:fillRect/>
-          </a:stretch>
-        </p:blipFill>
-        <p:spPr>
-          <a:xfrm>
-            <a:off x="0" y="658368"/>
-            <a:ext cx="5120640" cy="5833872"/>
-          </a:xfrm>
-          <a:prstGeom prst="rect">
-            <a:avLst/>
-          </a:prstGeom>
-        </p:spPr>
-      </p:pic>
-      <p:sp>
-        <p:nvSpPr>
-          <p:cNvPr id="4" name="Text 1"/>
-          <p:cNvSpPr/>
-          <p:nvPr/>
-        </p:nvSpPr>
-        <p:spPr>
-          <a:xfrm>
-            <a:off x="5349240" y="1005840"/>
-            <a:ext cx="6522415" cy="731520"/>
-          </a:xfrm>
-          <a:prstGeom prst="rect">
-            <a:avLst/>
-          </a:prstGeom>
-          <a:noFill/>
-          <a:ln/>
-        </p:spPr>
-        <p:txBody>
-          <a:bodyPr wrap="square" lIns="0" tIns="0" rIns="0" bIns="0" rtlCol="0" anchor="ctr">
-            <a:normAutofit/>
-          </a:bodyPr>
-          <a:lstStyle/>
-          <a:p>
-            <a:pPr algn="ctr" indent="0" marL="0">
-              <a:buNone/>
-            </a:pPr>
-            <a:r>
-              <a:rPr lang="en-US" sz="3600" b="1" dirty="0">
-                <a:solidFill>
-                  <a:srgbClr val="990011"/>
-                </a:solidFill>
-                <a:latin typeface="Times New Roman" pitchFamily="34" charset="0"/>
-                <a:ea typeface="Times New Roman" pitchFamily="34" charset="-122"/>
-                <a:cs typeface="Times New Roman" pitchFamily="34" charset="-120"/>
-              </a:rPr>
-              <a:t>Correction: Possible Answer</a:t>
-            </a:r>
-            <a:endParaRPr lang="en-US" sz="3600" dirty="0"/>
-          </a:p>
-        </p:txBody>
-      </p:sp>
-      <p:sp>
-        <p:nvSpPr>
-          <p:cNvPr id="5" name="Text 2"/>
-          <p:cNvSpPr/>
-          <p:nvPr/>
-        </p:nvSpPr>
-        <p:spPr>
-          <a:xfrm>
-            <a:off x="5349240" y="1783080"/>
-            <a:ext cx="6522415" cy="4663440"/>
-          </a:xfrm>
-          <a:prstGeom prst="rect">
-            <a:avLst/>
-          </a:prstGeom>
-          <a:noFill/>
-          <a:ln/>
-        </p:spPr>
-        <p:txBody>
-          <a:bodyPr wrap="square" lIns="0" tIns="0" rIns="0" bIns="0" rtlCol="0" anchor="t"/>
-          <a:lstStyle/>
-          <a:p>
-            <a:pPr algn="l" indent="0" marL="0">
-              <a:spcAft>
-                <a:spcPts val="800"/>
-              </a:spcAft>
-              <a:buNone/>
-            </a:pPr>
-            <a:r>
-              <a:rPr lang="en-US" sz="4000" dirty="0">
-                <a:solidFill>
-                  <a:srgbClr val="111111"/>
-                </a:solidFill>
-                <a:latin typeface="Times New Roman" pitchFamily="34" charset="0"/>
-                <a:ea typeface="Times New Roman" pitchFamily="34" charset="-122"/>
-                <a:cs typeface="Times New Roman" pitchFamily="34" charset="-120"/>
-              </a:rPr>
-              <a:t>Sapele (furniture), iroko (building), ebony (carving) (also ayous for plywood).</a:t>
-            </a:r>
-            <a:endParaRPr lang="en-US" sz="4000" dirty="0"/>
-          </a:p>
-        </p:txBody>
-      </p:sp>
-      <p:sp>
-        <p:nvSpPr>
-          <p:cNvPr id="25" name="Slide Number Placeholder 0"/>
-          <p:cNvSpPr>
-            <a:spLocks noGrp="1"/>
-          </p:cNvSpPr>
-          <p:nvPr>
-            <p:ph type="sldNum" sz="quarter" idx="4294967295"/>
-          </p:nvPr>
-        </p:nvSpPr>
-        <p:spPr>
-          <a:xfrm>
-            <a:off x="27432" y="91440"/>
-            <a:ext cx="585216" cy="475488"/>
-          </a:xfrm>
-          <a:prstGeom prst="rect">
-            <a:avLst/>
-          </a:prstGeom>
-          <a:extLst>
-            <a:ext uri="{C572A759-6A51-4108-AA02-DFA0A04FC94B}">
-              <ma14:wrappingTextBoxFlag xmlns:ma14="http://schemas.microsoft.com/office/mac/drawingml/2011/main" val="0"/>
-            </a:ext>
-          </a:extLst>
-        </p:spPr>
-        <p:txBody>
-          <a:bodyPr/>
-          <a:lstStyle>
-            <a:lvl1pPr>
-              <a:defRPr sz="2000">
-                <a:solidFill>
-                  <a:srgbClr val="FFFFFF"/>
-                </a:solidFill>
-                <a:latin typeface="Calibri"/>
-                <a:ea typeface="Calibri"/>
-                <a:cs typeface="Calibri"/>
-              </a:defRPr>
-            </a:lvl1pPr>
-          </a:lstStyle>
-          <a:p>
-            <a:pPr algn="ctr"/>
-            <a:fld id="{F7021451-1387-4CA6-816F-3879F97B5CBC}" type="slidenum">
-              <a:rPr b="1" lang="en-US"/>
-              <a:t>5</a:t>
+              <a:t>54</a:t>
             </a:fld>
             <a:endParaRPr lang="en-US"/>
           </a:p>
